--- a/chapter11/chapter11.pptx
+++ b/chapter11/chapter11.pptx
@@ -10365,10 +10365,12 @@
           </a:bodyPr>
           <a:lstStyle/>
           <a:p>
-            <a:pPr>
+            <a:pPr lvl="0" marL="457200" indent="-228600">
+              <a:buFont typeface="Calibri"/>
               <a:spcAft>
                 <a:spcPts val="1000"/>
               </a:spcAft>
+              <a:buSzPct val="100000"/>
               <a:buChar char="•"/>
               <a:lnSpc>
                 <a:spcPts val="2200"/>
@@ -10504,10 +10506,12 @@
           </a:bodyPr>
           <a:lstStyle/>
           <a:p>
-            <a:pPr>
+            <a:pPr lvl="0" marL="457200" indent="-228600">
+              <a:buFont typeface="Calibri"/>
               <a:spcAft>
                 <a:spcPts val="1000"/>
               </a:spcAft>
+              <a:buSzPct val="100000"/>
               <a:buChar char="•"/>
               <a:lnSpc>
                 <a:spcPts val="2200"/>
@@ -10524,10 +10528,12 @@
             </a:r>
           </a:p>
           <a:p>
-            <a:pPr>
+            <a:pPr lvl="0" marL="457200" indent="-228600">
+              <a:buFont typeface="Calibri"/>
               <a:spcAft>
                 <a:spcPts val="1000"/>
               </a:spcAft>
+              <a:buSzPct val="100000"/>
               <a:buChar char="•"/>
               <a:lnSpc>
                 <a:spcPts val="2200"/>
@@ -10544,10 +10550,12 @@
             </a:r>
           </a:p>
           <a:p>
-            <a:pPr>
+            <a:pPr lvl="0" marL="457200" indent="-228600">
+              <a:buFont typeface="Calibri"/>
               <a:spcAft>
                 <a:spcPts val="1000"/>
               </a:spcAft>
+              <a:buSzPct val="100000"/>
               <a:buChar char="•"/>
               <a:lnSpc>
                 <a:spcPts val="2200"/>
@@ -10683,10 +10691,12 @@
           </a:bodyPr>
           <a:lstStyle/>
           <a:p>
-            <a:pPr>
+            <a:pPr lvl="0" marL="457200" indent="-228600">
+              <a:buFont typeface="Calibri"/>
               <a:spcAft>
                 <a:spcPts val="1000"/>
               </a:spcAft>
+              <a:buSzPct val="100000"/>
               <a:buChar char="•"/>
               <a:lnSpc>
                 <a:spcPts val="2200"/>
@@ -10703,10 +10713,12 @@
             </a:r>
           </a:p>
           <a:p>
-            <a:pPr>
+            <a:pPr lvl="0" marL="457200" indent="-228600">
+              <a:buFont typeface="Calibri"/>
               <a:spcAft>
                 <a:spcPts val="1000"/>
               </a:spcAft>
+              <a:buSzPct val="100000"/>
               <a:buChar char="•"/>
               <a:lnSpc>
                 <a:spcPts val="2200"/>
@@ -10723,10 +10735,12 @@
             </a:r>
           </a:p>
           <a:p>
-            <a:pPr>
+            <a:pPr lvl="0" marL="457200" indent="-228600">
+              <a:buFont typeface="Calibri"/>
               <a:spcAft>
                 <a:spcPts val="1000"/>
               </a:spcAft>
+              <a:buSzPct val="100000"/>
               <a:buChar char="•"/>
               <a:lnSpc>
                 <a:spcPts val="2200"/>
@@ -10743,10 +10757,12 @@
             </a:r>
           </a:p>
           <a:p>
-            <a:pPr>
+            <a:pPr lvl="0" marL="457200" indent="-228600">
+              <a:buFont typeface="Calibri"/>
               <a:spcAft>
                 <a:spcPts val="1000"/>
               </a:spcAft>
+              <a:buSzPct val="100000"/>
               <a:buChar char="•"/>
               <a:lnSpc>
                 <a:spcPts val="2200"/>
@@ -10763,10 +10779,12 @@
             </a:r>
           </a:p>
           <a:p>
-            <a:pPr>
+            <a:pPr lvl="0" marL="457200" indent="-228600">
+              <a:buFont typeface="Calibri"/>
               <a:spcAft>
                 <a:spcPts val="1000"/>
               </a:spcAft>
+              <a:buSzPct val="100000"/>
               <a:buChar char="•"/>
               <a:lnSpc>
                 <a:spcPts val="2200"/>
@@ -10902,10 +10920,12 @@
           </a:bodyPr>
           <a:lstStyle/>
           <a:p>
-            <a:pPr>
+            <a:pPr lvl="0" marL="457200" indent="-228600">
+              <a:buFont typeface="Calibri"/>
               <a:spcAft>
                 <a:spcPts val="1000"/>
               </a:spcAft>
+              <a:buSzPct val="100000"/>
               <a:buChar char="•"/>
               <a:lnSpc>
                 <a:spcPts val="2200"/>
@@ -10922,10 +10942,12 @@
             </a:r>
           </a:p>
           <a:p>
-            <a:pPr>
+            <a:pPr lvl="0" marL="457200" indent="-228600">
+              <a:buFont typeface="Calibri"/>
               <a:spcAft>
                 <a:spcPts val="1000"/>
               </a:spcAft>
+              <a:buSzPct val="100000"/>
               <a:buChar char="•"/>
               <a:lnSpc>
                 <a:spcPts val="2200"/>
@@ -10942,10 +10964,12 @@
             </a:r>
           </a:p>
           <a:p>
-            <a:pPr>
+            <a:pPr lvl="0" marL="457200" indent="-228600">
+              <a:buFont typeface="Calibri"/>
               <a:spcAft>
                 <a:spcPts val="1000"/>
               </a:spcAft>
+              <a:buSzPct val="100000"/>
               <a:buChar char="•"/>
               <a:lnSpc>
                 <a:spcPts val="2200"/>
@@ -10962,10 +10986,12 @@
             </a:r>
           </a:p>
           <a:p>
-            <a:pPr>
+            <a:pPr lvl="0" marL="457200" indent="-228600">
+              <a:buFont typeface="Calibri"/>
               <a:spcAft>
                 <a:spcPts val="1000"/>
               </a:spcAft>
+              <a:buSzPct val="100000"/>
               <a:buChar char="•"/>
               <a:lnSpc>
                 <a:spcPts val="2200"/>
@@ -10982,10 +11008,12 @@
             </a:r>
           </a:p>
           <a:p>
-            <a:pPr>
+            <a:pPr lvl="0" marL="457200" indent="-228600">
+              <a:buFont typeface="Calibri"/>
               <a:spcAft>
                 <a:spcPts val="1000"/>
               </a:spcAft>
+              <a:buSzPct val="100000"/>
               <a:buChar char="•"/>
               <a:lnSpc>
                 <a:spcPts val="2200"/>
@@ -11584,10 +11612,12 @@
           </a:bodyPr>
           <a:lstStyle/>
           <a:p>
-            <a:pPr>
+            <a:pPr lvl="0" marL="457200" indent="-228600">
+              <a:buFont typeface="Calibri"/>
               <a:spcAft>
                 <a:spcPts val="1000"/>
               </a:spcAft>
+              <a:buSzPct val="100000"/>
               <a:buChar char="•"/>
               <a:lnSpc>
                 <a:spcPts val="2200"/>
@@ -11604,10 +11634,12 @@
             </a:r>
           </a:p>
           <a:p>
-            <a:pPr>
+            <a:pPr lvl="0" marL="457200" indent="-228600">
+              <a:buFont typeface="Calibri"/>
               <a:spcAft>
                 <a:spcPts val="1000"/>
               </a:spcAft>
+              <a:buSzPct val="100000"/>
               <a:buChar char="•"/>
               <a:lnSpc>
                 <a:spcPts val="2200"/>
@@ -11624,10 +11656,12 @@
             </a:r>
           </a:p>
           <a:p>
-            <a:pPr>
+            <a:pPr lvl="0" marL="457200" indent="-228600">
+              <a:buFont typeface="Calibri"/>
               <a:spcAft>
                 <a:spcPts val="1000"/>
               </a:spcAft>
+              <a:buSzPct val="100000"/>
               <a:buChar char="•"/>
               <a:lnSpc>
                 <a:spcPts val="2200"/>
@@ -11644,10 +11678,12 @@
             </a:r>
           </a:p>
           <a:p>
-            <a:pPr>
+            <a:pPr lvl="0" marL="457200" indent="-228600">
+              <a:buFont typeface="Calibri"/>
               <a:spcAft>
                 <a:spcPts val="1000"/>
               </a:spcAft>
+              <a:buSzPct val="100000"/>
               <a:buChar char="•"/>
               <a:lnSpc>
                 <a:spcPts val="2200"/>
@@ -11664,10 +11700,12 @@
             </a:r>
           </a:p>
           <a:p>
-            <a:pPr>
+            <a:pPr lvl="0" marL="457200" indent="-228600">
+              <a:buFont typeface="Calibri"/>
               <a:spcAft>
                 <a:spcPts val="1000"/>
               </a:spcAft>
+              <a:buSzPct val="100000"/>
               <a:buChar char="•"/>
               <a:lnSpc>
                 <a:spcPts val="2200"/>
@@ -12266,10 +12304,12 @@
           </a:bodyPr>
           <a:lstStyle/>
           <a:p>
-            <a:pPr>
+            <a:pPr lvl="0" marL="457200" indent="-228600">
+              <a:buFont typeface="Calibri"/>
               <a:spcAft>
                 <a:spcPts val="1000"/>
               </a:spcAft>
+              <a:buSzPct val="100000"/>
               <a:buChar char="•"/>
               <a:lnSpc>
                 <a:spcPts val="2200"/>
@@ -12286,10 +12326,12 @@
             </a:r>
           </a:p>
           <a:p>
-            <a:pPr>
+            <a:pPr lvl="0" marL="457200" indent="-228600">
+              <a:buFont typeface="Calibri"/>
               <a:spcAft>
                 <a:spcPts val="1000"/>
               </a:spcAft>
+              <a:buSzPct val="100000"/>
               <a:buChar char="•"/>
               <a:lnSpc>
                 <a:spcPts val="2200"/>
@@ -12306,10 +12348,12 @@
             </a:r>
           </a:p>
           <a:p>
-            <a:pPr>
+            <a:pPr lvl="0" marL="457200" indent="-228600">
+              <a:buFont typeface="Calibri"/>
               <a:spcAft>
                 <a:spcPts val="1000"/>
               </a:spcAft>
+              <a:buSzPct val="100000"/>
               <a:buChar char="•"/>
               <a:lnSpc>
                 <a:spcPts val="2200"/>
@@ -12326,10 +12370,12 @@
             </a:r>
           </a:p>
           <a:p>
-            <a:pPr>
+            <a:pPr lvl="0" marL="457200" indent="-228600">
+              <a:buFont typeface="Calibri"/>
               <a:spcAft>
                 <a:spcPts val="1000"/>
               </a:spcAft>
+              <a:buSzPct val="100000"/>
               <a:buChar char="•"/>
               <a:lnSpc>
                 <a:spcPts val="2200"/>
@@ -12346,10 +12392,12 @@
             </a:r>
           </a:p>
           <a:p>
-            <a:pPr>
+            <a:pPr lvl="0" marL="457200" indent="-228600">
+              <a:buFont typeface="Calibri"/>
               <a:spcAft>
                 <a:spcPts val="1000"/>
               </a:spcAft>
+              <a:buSzPct val="100000"/>
               <a:buChar char="•"/>
               <a:lnSpc>
                 <a:spcPts val="2200"/>
@@ -12948,10 +12996,12 @@
           </a:bodyPr>
           <a:lstStyle/>
           <a:p>
-            <a:pPr>
+            <a:pPr lvl="0" marL="457200" indent="-228600">
+              <a:buFont typeface="Calibri"/>
               <a:spcAft>
                 <a:spcPts val="1000"/>
               </a:spcAft>
+              <a:buSzPct val="100000"/>
               <a:buChar char="•"/>
               <a:lnSpc>
                 <a:spcPts val="2200"/>
@@ -12968,10 +13018,12 @@
             </a:r>
           </a:p>
           <a:p>
-            <a:pPr>
+            <a:pPr lvl="0" marL="457200" indent="-228600">
+              <a:buFont typeface="Calibri"/>
               <a:spcAft>
                 <a:spcPts val="1000"/>
               </a:spcAft>
+              <a:buSzPct val="100000"/>
               <a:buChar char="•"/>
               <a:lnSpc>
                 <a:spcPts val="2200"/>
@@ -12988,10 +13040,12 @@
             </a:r>
           </a:p>
           <a:p>
-            <a:pPr>
+            <a:pPr lvl="0" marL="457200" indent="-228600">
+              <a:buFont typeface="Calibri"/>
               <a:spcAft>
                 <a:spcPts val="1000"/>
               </a:spcAft>
+              <a:buSzPct val="100000"/>
               <a:buChar char="•"/>
               <a:lnSpc>
                 <a:spcPts val="2200"/>
@@ -13127,10 +13181,12 @@
           </a:bodyPr>
           <a:lstStyle/>
           <a:p>
-            <a:pPr>
+            <a:pPr lvl="0" marL="457200" indent="-228600">
+              <a:buFont typeface="Calibri"/>
               <a:spcAft>
                 <a:spcPts val="1000"/>
               </a:spcAft>
+              <a:buSzPct val="100000"/>
               <a:buChar char="•"/>
               <a:lnSpc>
                 <a:spcPts val="2200"/>
@@ -13266,10 +13322,12 @@
           </a:bodyPr>
           <a:lstStyle/>
           <a:p>
-            <a:pPr>
+            <a:pPr lvl="0" marL="457200" indent="-228600">
+              <a:buFont typeface="Calibri"/>
               <a:spcAft>
                 <a:spcPts val="1000"/>
               </a:spcAft>
+              <a:buSzPct val="100000"/>
               <a:buChar char="•"/>
               <a:lnSpc>
                 <a:spcPts val="2200"/>
@@ -13286,10 +13344,12 @@
             </a:r>
           </a:p>
           <a:p>
-            <a:pPr>
+            <a:pPr lvl="0" marL="457200" indent="-228600">
+              <a:buFont typeface="Calibri"/>
               <a:spcAft>
                 <a:spcPts val="1000"/>
               </a:spcAft>
+              <a:buSzPct val="100000"/>
               <a:buChar char="•"/>
               <a:lnSpc>
                 <a:spcPts val="2200"/>
@@ -13306,10 +13366,12 @@
             </a:r>
           </a:p>
           <a:p>
-            <a:pPr>
+            <a:pPr lvl="0" marL="457200" indent="-228600">
+              <a:buFont typeface="Calibri"/>
               <a:spcAft>
                 <a:spcPts val="1000"/>
               </a:spcAft>
+              <a:buSzPct val="100000"/>
               <a:buChar char="•"/>
               <a:lnSpc>
                 <a:spcPts val="2200"/>
@@ -13326,10 +13388,12 @@
             </a:r>
           </a:p>
           <a:p>
-            <a:pPr>
+            <a:pPr lvl="0" marL="457200" indent="-228600">
+              <a:buFont typeface="Calibri"/>
               <a:spcAft>
                 <a:spcPts val="1000"/>
               </a:spcAft>
+              <a:buSzPct val="100000"/>
               <a:buChar char="•"/>
               <a:lnSpc>
                 <a:spcPts val="2200"/>
@@ -13346,10 +13410,12 @@
             </a:r>
           </a:p>
           <a:p>
-            <a:pPr>
+            <a:pPr lvl="0" marL="457200" indent="-228600">
+              <a:buFont typeface="Calibri"/>
               <a:spcAft>
                 <a:spcPts val="1000"/>
               </a:spcAft>
+              <a:buSzPct val="100000"/>
               <a:buChar char="•"/>
               <a:lnSpc>
                 <a:spcPts val="2200"/>
@@ -13485,10 +13551,12 @@
           </a:bodyPr>
           <a:lstStyle/>
           <a:p>
-            <a:pPr>
+            <a:pPr lvl="0" marL="457200" indent="-228600">
+              <a:buFont typeface="Calibri"/>
               <a:spcAft>
                 <a:spcPts val="1000"/>
               </a:spcAft>
+              <a:buSzPct val="100000"/>
               <a:buChar char="•"/>
               <a:lnSpc>
                 <a:spcPts val="2200"/>
@@ -13505,10 +13573,12 @@
             </a:r>
           </a:p>
           <a:p>
-            <a:pPr>
+            <a:pPr lvl="0" marL="457200" indent="-228600">
+              <a:buFont typeface="Calibri"/>
               <a:spcAft>
                 <a:spcPts val="1000"/>
               </a:spcAft>
+              <a:buSzPct val="100000"/>
               <a:buChar char="•"/>
               <a:lnSpc>
                 <a:spcPts val="2200"/>
@@ -13525,10 +13595,12 @@
             </a:r>
           </a:p>
           <a:p>
-            <a:pPr>
+            <a:pPr lvl="0" marL="457200" indent="-228600">
+              <a:buFont typeface="Calibri"/>
               <a:spcAft>
                 <a:spcPts val="1000"/>
               </a:spcAft>
+              <a:buSzPct val="100000"/>
               <a:buChar char="•"/>
               <a:lnSpc>
                 <a:spcPts val="2200"/>
@@ -13664,10 +13736,12 @@
           </a:bodyPr>
           <a:lstStyle/>
           <a:p>
-            <a:pPr>
+            <a:pPr lvl="0" marL="457200" indent="-228600">
+              <a:buFont typeface="Calibri"/>
               <a:spcAft>
                 <a:spcPts val="1000"/>
               </a:spcAft>
+              <a:buSzPct val="100000"/>
               <a:buChar char="•"/>
               <a:lnSpc>
                 <a:spcPts val="2200"/>
@@ -13684,10 +13758,12 @@
             </a:r>
           </a:p>
           <a:p>
-            <a:pPr>
+            <a:pPr lvl="0" marL="457200" indent="-228600">
+              <a:buFont typeface="Calibri"/>
               <a:spcAft>
                 <a:spcPts val="1000"/>
               </a:spcAft>
+              <a:buSzPct val="100000"/>
               <a:buChar char="•"/>
               <a:lnSpc>
                 <a:spcPts val="2200"/>
@@ -13823,10 +13899,12 @@
           </a:bodyPr>
           <a:lstStyle/>
           <a:p>
-            <a:pPr>
+            <a:pPr lvl="0" marL="457200" indent="-228600">
+              <a:buFont typeface="Calibri"/>
               <a:spcAft>
                 <a:spcPts val="1000"/>
               </a:spcAft>
+              <a:buSzPct val="100000"/>
               <a:buChar char="•"/>
               <a:lnSpc>
                 <a:spcPts val="2200"/>
@@ -13962,10 +14040,12 @@
           </a:bodyPr>
           <a:lstStyle/>
           <a:p>
-            <a:pPr>
+            <a:pPr lvl="0" marL="457200" indent="-228600">
+              <a:buFont typeface="Calibri"/>
               <a:spcAft>
                 <a:spcPts val="1000"/>
               </a:spcAft>
+              <a:buSzPct val="100000"/>
               <a:buChar char="•"/>
               <a:lnSpc>
                 <a:spcPts val="2200"/>
@@ -13982,10 +14062,12 @@
             </a:r>
           </a:p>
           <a:p>
-            <a:pPr>
+            <a:pPr lvl="0" marL="457200" indent="-228600">
+              <a:buFont typeface="Calibri"/>
               <a:spcAft>
                 <a:spcPts val="1000"/>
               </a:spcAft>
+              <a:buSzPct val="100000"/>
               <a:buChar char="•"/>
               <a:lnSpc>
                 <a:spcPts val="2200"/>
@@ -14002,10 +14084,12 @@
             </a:r>
           </a:p>
           <a:p>
-            <a:pPr>
+            <a:pPr lvl="0" marL="457200" indent="-228600">
+              <a:buFont typeface="Calibri"/>
               <a:spcAft>
                 <a:spcPts val="1000"/>
               </a:spcAft>
+              <a:buSzPct val="100000"/>
               <a:buChar char="•"/>
               <a:lnSpc>
                 <a:spcPts val="2200"/>
@@ -14022,10 +14106,12 @@
             </a:r>
           </a:p>
           <a:p>
-            <a:pPr>
+            <a:pPr lvl="0" marL="457200" indent="-228600">
+              <a:buFont typeface="Calibri"/>
               <a:spcAft>
                 <a:spcPts val="1000"/>
               </a:spcAft>
+              <a:buSzPct val="100000"/>
               <a:buChar char="•"/>
               <a:lnSpc>
                 <a:spcPts val="2200"/>
@@ -14042,10 +14128,12 @@
             </a:r>
           </a:p>
           <a:p>
-            <a:pPr>
+            <a:pPr lvl="0" marL="457200" indent="-228600">
+              <a:buFont typeface="Calibri"/>
               <a:spcAft>
                 <a:spcPts val="1000"/>
               </a:spcAft>
+              <a:buSzPct val="100000"/>
               <a:buChar char="•"/>
               <a:lnSpc>
                 <a:spcPts val="2200"/>
@@ -14181,10 +14269,12 @@
           </a:bodyPr>
           <a:lstStyle/>
           <a:p>
-            <a:pPr>
+            <a:pPr lvl="0" marL="457200" indent="-228600">
+              <a:buFont typeface="Calibri"/>
               <a:spcAft>
                 <a:spcPts val="1000"/>
               </a:spcAft>
+              <a:buSzPct val="100000"/>
               <a:buChar char="•"/>
               <a:lnSpc>
                 <a:spcPts val="2200"/>
@@ -14201,10 +14291,12 @@
             </a:r>
           </a:p>
           <a:p>
-            <a:pPr>
+            <a:pPr lvl="0" marL="457200" indent="-228600">
+              <a:buFont typeface="Calibri"/>
               <a:spcAft>
                 <a:spcPts val="1000"/>
               </a:spcAft>
+              <a:buSzPct val="100000"/>
               <a:buChar char="•"/>
               <a:lnSpc>
                 <a:spcPts val="2200"/>
@@ -14221,10 +14313,12 @@
             </a:r>
           </a:p>
           <a:p>
-            <a:pPr>
+            <a:pPr lvl="0" marL="457200" indent="-228600">
+              <a:buFont typeface="Calibri"/>
               <a:spcAft>
                 <a:spcPts val="1000"/>
               </a:spcAft>
+              <a:buSzPct val="100000"/>
               <a:buChar char="•"/>
               <a:lnSpc>
                 <a:spcPts val="2200"/>
@@ -14241,10 +14335,12 @@
             </a:r>
           </a:p>
           <a:p>
-            <a:pPr>
+            <a:pPr lvl="0" marL="457200" indent="-228600">
+              <a:buFont typeface="Calibri"/>
               <a:spcAft>
                 <a:spcPts val="1000"/>
               </a:spcAft>
+              <a:buSzPct val="100000"/>
               <a:buChar char="•"/>
               <a:lnSpc>
                 <a:spcPts val="2200"/>
@@ -14261,10 +14357,12 @@
             </a:r>
           </a:p>
           <a:p>
-            <a:pPr>
+            <a:pPr lvl="0" marL="457200" indent="-228600">
+              <a:buFont typeface="Calibri"/>
               <a:spcAft>
                 <a:spcPts val="1000"/>
               </a:spcAft>
+              <a:buSzPct val="100000"/>
               <a:buChar char="•"/>
               <a:lnSpc>
                 <a:spcPts val="2200"/>
@@ -14400,10 +14498,12 @@
           </a:bodyPr>
           <a:lstStyle/>
           <a:p>
-            <a:pPr>
+            <a:pPr lvl="0" marL="457200" indent="-228600">
+              <a:buFont typeface="Calibri"/>
               <a:spcAft>
                 <a:spcPts val="1000"/>
               </a:spcAft>
+              <a:buSzPct val="100000"/>
               <a:buChar char="•"/>
               <a:lnSpc>
                 <a:spcPts val="2200"/>
@@ -14420,10 +14520,12 @@
             </a:r>
           </a:p>
           <a:p>
-            <a:pPr>
+            <a:pPr lvl="0" marL="457200" indent="-228600">
+              <a:buFont typeface="Calibri"/>
               <a:spcAft>
                 <a:spcPts val="1000"/>
               </a:spcAft>
+              <a:buSzPct val="100000"/>
               <a:buChar char="•"/>
               <a:lnSpc>
                 <a:spcPts val="2200"/>
@@ -14440,10 +14542,12 @@
             </a:r>
           </a:p>
           <a:p>
-            <a:pPr>
+            <a:pPr lvl="0" marL="457200" indent="-228600">
+              <a:buFont typeface="Calibri"/>
               <a:spcAft>
                 <a:spcPts val="1000"/>
               </a:spcAft>
+              <a:buSzPct val="100000"/>
               <a:buChar char="•"/>
               <a:lnSpc>
                 <a:spcPts val="2200"/>
@@ -14579,10 +14683,12 @@
           </a:bodyPr>
           <a:lstStyle/>
           <a:p>
-            <a:pPr>
+            <a:pPr lvl="0" marL="457200" indent="-228600">
+              <a:buFont typeface="Calibri"/>
               <a:spcAft>
                 <a:spcPts val="1000"/>
               </a:spcAft>
+              <a:buSzPct val="100000"/>
               <a:buChar char="•"/>
               <a:lnSpc>
                 <a:spcPts val="2200"/>
@@ -14599,10 +14705,12 @@
             </a:r>
           </a:p>
           <a:p>
-            <a:pPr>
+            <a:pPr lvl="0" marL="457200" indent="-228600">
+              <a:buFont typeface="Calibri"/>
               <a:spcAft>
                 <a:spcPts val="1000"/>
               </a:spcAft>
+              <a:buSzPct val="100000"/>
               <a:buChar char="•"/>
               <a:lnSpc>
                 <a:spcPts val="2200"/>
@@ -14619,10 +14727,12 @@
             </a:r>
           </a:p>
           <a:p>
-            <a:pPr>
+            <a:pPr lvl="0" marL="457200" indent="-228600">
+              <a:buFont typeface="Calibri"/>
               <a:spcAft>
                 <a:spcPts val="1000"/>
               </a:spcAft>
+              <a:buSzPct val="100000"/>
               <a:buChar char="•"/>
               <a:lnSpc>
                 <a:spcPts val="2200"/>
@@ -14639,10 +14749,12 @@
             </a:r>
           </a:p>
           <a:p>
-            <a:pPr>
+            <a:pPr lvl="0" marL="457200" indent="-228600">
+              <a:buFont typeface="Calibri"/>
               <a:spcAft>
                 <a:spcPts val="1000"/>
               </a:spcAft>
+              <a:buSzPct val="100000"/>
               <a:buChar char="•"/>
               <a:lnSpc>
                 <a:spcPts val="2200"/>
@@ -14659,10 +14771,12 @@
             </a:r>
           </a:p>
           <a:p>
-            <a:pPr>
+            <a:pPr lvl="0" marL="457200" indent="-228600">
+              <a:buFont typeface="Calibri"/>
               <a:spcAft>
                 <a:spcPts val="1000"/>
               </a:spcAft>
+              <a:buSzPct val="100000"/>
               <a:buChar char="•"/>
               <a:lnSpc>
                 <a:spcPts val="2200"/>
@@ -14798,10 +14912,12 @@
           </a:bodyPr>
           <a:lstStyle/>
           <a:p>
-            <a:pPr>
+            <a:pPr lvl="0" marL="457200" indent="-228600">
+              <a:buFont typeface="Calibri"/>
               <a:spcAft>
                 <a:spcPts val="1000"/>
               </a:spcAft>
+              <a:buSzPct val="100000"/>
               <a:buChar char="•"/>
               <a:lnSpc>
                 <a:spcPts val="2200"/>
@@ -14818,10 +14934,12 @@
             </a:r>
           </a:p>
           <a:p>
-            <a:pPr>
+            <a:pPr lvl="0" marL="457200" indent="-228600">
+              <a:buFont typeface="Calibri"/>
               <a:spcAft>
                 <a:spcPts val="1000"/>
               </a:spcAft>
+              <a:buSzPct val="100000"/>
               <a:buChar char="•"/>
               <a:lnSpc>
                 <a:spcPts val="2200"/>
@@ -14838,10 +14956,12 @@
             </a:r>
           </a:p>
           <a:p>
-            <a:pPr>
+            <a:pPr lvl="0" marL="457200" indent="-228600">
+              <a:buFont typeface="Calibri"/>
               <a:spcAft>
                 <a:spcPts val="1000"/>
               </a:spcAft>
+              <a:buSzPct val="100000"/>
               <a:buChar char="•"/>
               <a:lnSpc>
                 <a:spcPts val="2200"/>
@@ -14858,10 +14978,12 @@
             </a:r>
           </a:p>
           <a:p>
-            <a:pPr>
+            <a:pPr lvl="0" marL="457200" indent="-228600">
+              <a:buFont typeface="Calibri"/>
               <a:spcAft>
                 <a:spcPts val="1000"/>
               </a:spcAft>
+              <a:buSzPct val="100000"/>
               <a:buChar char="•"/>
               <a:lnSpc>
                 <a:spcPts val="2200"/>
@@ -14997,10 +15119,12 @@
           </a:bodyPr>
           <a:lstStyle/>
           <a:p>
-            <a:pPr>
+            <a:pPr lvl="0" marL="457200" indent="-228600">
+              <a:buFont typeface="Calibri"/>
               <a:spcAft>
                 <a:spcPts val="1000"/>
               </a:spcAft>
+              <a:buSzPct val="100000"/>
               <a:buChar char="•"/>
               <a:lnSpc>
                 <a:spcPts val="2200"/>
@@ -15017,10 +15141,12 @@
             </a:r>
           </a:p>
           <a:p>
-            <a:pPr>
+            <a:pPr lvl="0" marL="457200" indent="-228600">
+              <a:buFont typeface="Calibri"/>
               <a:spcAft>
                 <a:spcPts val="1000"/>
               </a:spcAft>
+              <a:buSzPct val="100000"/>
               <a:buChar char="•"/>
               <a:lnSpc>
                 <a:spcPts val="2200"/>
@@ -15037,10 +15163,12 @@
             </a:r>
           </a:p>
           <a:p>
-            <a:pPr>
+            <a:pPr lvl="0" marL="457200" indent="-228600">
+              <a:buFont typeface="Calibri"/>
               <a:spcAft>
                 <a:spcPts val="1000"/>
               </a:spcAft>
+              <a:buSzPct val="100000"/>
               <a:buChar char="•"/>
               <a:lnSpc>
                 <a:spcPts val="2200"/>
@@ -15057,10 +15185,12 @@
             </a:r>
           </a:p>
           <a:p>
-            <a:pPr>
+            <a:pPr lvl="0" marL="457200" indent="-228600">
+              <a:buFont typeface="Calibri"/>
               <a:spcAft>
                 <a:spcPts val="1000"/>
               </a:spcAft>
+              <a:buSzPct val="100000"/>
               <a:buChar char="•"/>
               <a:lnSpc>
                 <a:spcPts val="2200"/>
@@ -15077,10 +15207,12 @@
             </a:r>
           </a:p>
           <a:p>
-            <a:pPr>
+            <a:pPr lvl="0" marL="457200" indent="-228600">
+              <a:buFont typeface="Calibri"/>
               <a:spcAft>
                 <a:spcPts val="1000"/>
               </a:spcAft>
+              <a:buSzPct val="100000"/>
               <a:buChar char="•"/>
               <a:lnSpc>
                 <a:spcPts val="2200"/>
@@ -15216,10 +15348,12 @@
           </a:bodyPr>
           <a:lstStyle/>
           <a:p>
-            <a:pPr>
+            <a:pPr lvl="0" marL="457200" indent="-228600">
+              <a:buFont typeface="Calibri"/>
               <a:spcAft>
                 <a:spcPts val="1000"/>
               </a:spcAft>
+              <a:buSzPct val="100000"/>
               <a:buChar char="•"/>
               <a:lnSpc>
                 <a:spcPts val="2200"/>
@@ -15236,10 +15370,12 @@
             </a:r>
           </a:p>
           <a:p>
-            <a:pPr>
+            <a:pPr lvl="0" marL="457200" indent="-228600">
+              <a:buFont typeface="Calibri"/>
               <a:spcAft>
                 <a:spcPts val="1000"/>
               </a:spcAft>
+              <a:buSzPct val="100000"/>
               <a:buChar char="•"/>
               <a:lnSpc>
                 <a:spcPts val="2200"/>
@@ -15256,10 +15392,12 @@
             </a:r>
           </a:p>
           <a:p>
-            <a:pPr>
+            <a:pPr lvl="0" marL="457200" indent="-228600">
+              <a:buFont typeface="Calibri"/>
               <a:spcAft>
                 <a:spcPts val="1000"/>
               </a:spcAft>
+              <a:buSzPct val="100000"/>
               <a:buChar char="•"/>
               <a:lnSpc>
                 <a:spcPts val="2200"/>
@@ -15395,10 +15533,12 @@
           </a:bodyPr>
           <a:lstStyle/>
           <a:p>
-            <a:pPr>
+            <a:pPr lvl="0" marL="457200" indent="-228600">
+              <a:buFont typeface="Calibri"/>
               <a:spcAft>
                 <a:spcPts val="1000"/>
               </a:spcAft>
+              <a:buSzPct val="100000"/>
               <a:buChar char="•"/>
               <a:lnSpc>
                 <a:spcPts val="2200"/>
@@ -15415,10 +15555,12 @@
             </a:r>
           </a:p>
           <a:p>
-            <a:pPr>
+            <a:pPr lvl="0" marL="457200" indent="-228600">
+              <a:buFont typeface="Calibri"/>
               <a:spcAft>
                 <a:spcPts val="1000"/>
               </a:spcAft>
+              <a:buSzPct val="100000"/>
               <a:buChar char="•"/>
               <a:lnSpc>
                 <a:spcPts val="2200"/>
@@ -15435,10 +15577,12 @@
             </a:r>
           </a:p>
           <a:p>
-            <a:pPr>
+            <a:pPr lvl="0" marL="457200" indent="-228600">
+              <a:buFont typeface="Calibri"/>
               <a:spcAft>
                 <a:spcPts val="1000"/>
               </a:spcAft>
+              <a:buSzPct val="100000"/>
               <a:buChar char="•"/>
               <a:lnSpc>
                 <a:spcPts val="2200"/>
@@ -15455,10 +15599,12 @@
             </a:r>
           </a:p>
           <a:p>
-            <a:pPr>
+            <a:pPr lvl="0" marL="457200" indent="-228600">
+              <a:buFont typeface="Calibri"/>
               <a:spcAft>
                 <a:spcPts val="1000"/>
               </a:spcAft>
+              <a:buSzPct val="100000"/>
               <a:buChar char="•"/>
               <a:lnSpc>
                 <a:spcPts val="2200"/>
@@ -15475,10 +15621,12 @@
             </a:r>
           </a:p>
           <a:p>
-            <a:pPr>
+            <a:pPr lvl="0" marL="457200" indent="-228600">
+              <a:buFont typeface="Calibri"/>
               <a:spcAft>
                 <a:spcPts val="1000"/>
               </a:spcAft>
+              <a:buSzPct val="100000"/>
               <a:buChar char="•"/>
               <a:lnSpc>
                 <a:spcPts val="2200"/>
@@ -15495,10 +15643,12 @@
             </a:r>
           </a:p>
           <a:p>
-            <a:pPr>
+            <a:pPr lvl="0" marL="457200" indent="-228600">
+              <a:buFont typeface="Calibri"/>
               <a:spcAft>
                 <a:spcPts val="1000"/>
               </a:spcAft>
+              <a:buSzPct val="100000"/>
               <a:buChar char="•"/>
               <a:lnSpc>
                 <a:spcPts val="2200"/>
@@ -15634,10 +15784,12 @@
           </a:bodyPr>
           <a:lstStyle/>
           <a:p>
-            <a:pPr>
+            <a:pPr lvl="0" marL="457200" indent="-228600">
+              <a:buFont typeface="Calibri"/>
               <a:spcAft>
                 <a:spcPts val="1000"/>
               </a:spcAft>
+              <a:buSzPct val="100000"/>
               <a:buChar char="•"/>
               <a:lnSpc>
                 <a:spcPts val="2200"/>
@@ -15654,10 +15806,12 @@
             </a:r>
           </a:p>
           <a:p>
-            <a:pPr>
+            <a:pPr lvl="0" marL="457200" indent="-228600">
+              <a:buFont typeface="Calibri"/>
               <a:spcAft>
                 <a:spcPts val="1000"/>
               </a:spcAft>
+              <a:buSzPct val="100000"/>
               <a:buChar char="•"/>
               <a:lnSpc>
                 <a:spcPts val="2200"/>
@@ -15674,10 +15828,12 @@
             </a:r>
           </a:p>
           <a:p>
-            <a:pPr>
+            <a:pPr lvl="0" marL="457200" indent="-228600">
+              <a:buFont typeface="Calibri"/>
               <a:spcAft>
                 <a:spcPts val="1000"/>
               </a:spcAft>
+              <a:buSzPct val="100000"/>
               <a:buChar char="•"/>
               <a:lnSpc>
                 <a:spcPts val="2200"/>
@@ -15813,10 +15969,12 @@
           </a:bodyPr>
           <a:lstStyle/>
           <a:p>
-            <a:pPr>
+            <a:pPr lvl="0" marL="457200" indent="-228600">
+              <a:buFont typeface="Calibri"/>
               <a:spcAft>
                 <a:spcPts val="1000"/>
               </a:spcAft>
+              <a:buSzPct val="100000"/>
               <a:buChar char="•"/>
               <a:lnSpc>
                 <a:spcPts val="2200"/>
@@ -15833,10 +15991,12 @@
             </a:r>
           </a:p>
           <a:p>
-            <a:pPr>
+            <a:pPr lvl="0" marL="457200" indent="-228600">
+              <a:buFont typeface="Calibri"/>
               <a:spcAft>
                 <a:spcPts val="1000"/>
               </a:spcAft>
+              <a:buSzPct val="100000"/>
               <a:buChar char="•"/>
               <a:lnSpc>
                 <a:spcPts val="2200"/>
@@ -15972,10 +16132,12 @@
           </a:bodyPr>
           <a:lstStyle/>
           <a:p>
-            <a:pPr>
+            <a:pPr lvl="0" marL="457200" indent="-228600">
+              <a:buFont typeface="Calibri"/>
               <a:spcAft>
                 <a:spcPts val="1000"/>
               </a:spcAft>
+              <a:buSzPct val="100000"/>
               <a:buChar char="•"/>
               <a:lnSpc>
                 <a:spcPts val="2200"/>
@@ -16111,10 +16273,12 @@
           </a:bodyPr>
           <a:lstStyle/>
           <a:p>
-            <a:pPr>
+            <a:pPr lvl="0" marL="457200" indent="-228600">
+              <a:buFont typeface="Calibri"/>
               <a:spcAft>
                 <a:spcPts val="1000"/>
               </a:spcAft>
+              <a:buSzPct val="100000"/>
               <a:buChar char="•"/>
               <a:lnSpc>
                 <a:spcPts val="2200"/>
@@ -16131,10 +16295,12 @@
             </a:r>
           </a:p>
           <a:p>
-            <a:pPr>
+            <a:pPr lvl="0" marL="457200" indent="-228600">
+              <a:buFont typeface="Calibri"/>
               <a:spcAft>
                 <a:spcPts val="1000"/>
               </a:spcAft>
+              <a:buSzPct val="100000"/>
               <a:buChar char="•"/>
               <a:lnSpc>
                 <a:spcPts val="2200"/>
@@ -16151,10 +16317,12 @@
             </a:r>
           </a:p>
           <a:p>
-            <a:pPr>
+            <a:pPr lvl="0" marL="457200" indent="-228600">
+              <a:buFont typeface="Calibri"/>
               <a:spcAft>
                 <a:spcPts val="1000"/>
               </a:spcAft>
+              <a:buSzPct val="100000"/>
               <a:buChar char="•"/>
               <a:lnSpc>
                 <a:spcPts val="2200"/>
@@ -16290,10 +16458,12 @@
           </a:bodyPr>
           <a:lstStyle/>
           <a:p>
-            <a:pPr>
+            <a:pPr lvl="0" marL="457200" indent="-228600">
+              <a:buFont typeface="Calibri"/>
               <a:spcAft>
                 <a:spcPts val="1000"/>
               </a:spcAft>
+              <a:buSzPct val="100000"/>
               <a:buChar char="•"/>
               <a:lnSpc>
                 <a:spcPts val="2200"/>
@@ -16310,10 +16480,12 @@
             </a:r>
           </a:p>
           <a:p>
-            <a:pPr>
+            <a:pPr lvl="0" marL="457200" indent="-228600">
+              <a:buFont typeface="Calibri"/>
               <a:spcAft>
                 <a:spcPts val="1000"/>
               </a:spcAft>
+              <a:buSzPct val="100000"/>
               <a:buChar char="•"/>
               <a:lnSpc>
                 <a:spcPts val="2200"/>
@@ -16330,10 +16502,12 @@
             </a:r>
           </a:p>
           <a:p>
-            <a:pPr>
+            <a:pPr lvl="0" marL="457200" indent="-228600">
+              <a:buFont typeface="Calibri"/>
               <a:spcAft>
                 <a:spcPts val="1000"/>
               </a:spcAft>
+              <a:buSzPct val="100000"/>
               <a:buChar char="•"/>
               <a:lnSpc>
                 <a:spcPts val="2200"/>
@@ -16350,10 +16524,12 @@
             </a:r>
           </a:p>
           <a:p>
-            <a:pPr>
+            <a:pPr lvl="0" marL="457200" indent="-228600">
+              <a:buFont typeface="Calibri"/>
               <a:spcAft>
                 <a:spcPts val="1000"/>
               </a:spcAft>
+              <a:buSzPct val="100000"/>
               <a:buChar char="•"/>
               <a:lnSpc>
                 <a:spcPts val="2200"/>
@@ -16370,10 +16546,12 @@
             </a:r>
           </a:p>
           <a:p>
-            <a:pPr>
+            <a:pPr lvl="0" marL="457200" indent="-228600">
+              <a:buFont typeface="Calibri"/>
               <a:spcAft>
                 <a:spcPts val="1000"/>
               </a:spcAft>
+              <a:buSzPct val="100000"/>
               <a:buChar char="•"/>
               <a:lnSpc>
                 <a:spcPts val="2200"/>
@@ -16509,10 +16687,12 @@
           </a:bodyPr>
           <a:lstStyle/>
           <a:p>
-            <a:pPr>
+            <a:pPr lvl="0" marL="457200" indent="-228600">
+              <a:buFont typeface="Calibri"/>
               <a:spcAft>
                 <a:spcPts val="1000"/>
               </a:spcAft>
+              <a:buSzPct val="100000"/>
               <a:buChar char="•"/>
               <a:lnSpc>
                 <a:spcPts val="2200"/>
@@ -16529,10 +16709,12 @@
             </a:r>
           </a:p>
           <a:p>
-            <a:pPr>
+            <a:pPr lvl="0" marL="457200" indent="-228600">
+              <a:buFont typeface="Calibri"/>
               <a:spcAft>
                 <a:spcPts val="1000"/>
               </a:spcAft>
+              <a:buSzPct val="100000"/>
               <a:buChar char="•"/>
               <a:lnSpc>
                 <a:spcPts val="2200"/>
@@ -16668,10 +16850,12 @@
           </a:bodyPr>
           <a:lstStyle/>
           <a:p>
-            <a:pPr>
+            <a:pPr lvl="0" marL="457200" indent="-228600">
+              <a:buFont typeface="Calibri"/>
               <a:spcAft>
                 <a:spcPts val="1000"/>
               </a:spcAft>
+              <a:buSzPct val="100000"/>
               <a:buChar char="•"/>
               <a:lnSpc>
                 <a:spcPts val="2200"/>
@@ -16688,10 +16872,12 @@
             </a:r>
           </a:p>
           <a:p>
-            <a:pPr>
+            <a:pPr lvl="0" marL="457200" indent="-228600">
+              <a:buFont typeface="Calibri"/>
               <a:spcAft>
                 <a:spcPts val="1000"/>
               </a:spcAft>
+              <a:buSzPct val="100000"/>
               <a:buChar char="•"/>
               <a:lnSpc>
                 <a:spcPts val="2200"/>
@@ -16708,10 +16894,12 @@
             </a:r>
           </a:p>
           <a:p>
-            <a:pPr>
+            <a:pPr lvl="0" marL="457200" indent="-228600">
+              <a:buFont typeface="Calibri"/>
               <a:spcAft>
                 <a:spcPts val="1000"/>
               </a:spcAft>
+              <a:buSzPct val="100000"/>
               <a:buChar char="•"/>
               <a:lnSpc>
                 <a:spcPts val="2200"/>
@@ -16728,10 +16916,12 @@
             </a:r>
           </a:p>
           <a:p>
-            <a:pPr>
+            <a:pPr lvl="0" marL="457200" indent="-228600">
+              <a:buFont typeface="Calibri"/>
               <a:spcAft>
                 <a:spcPts val="1000"/>
               </a:spcAft>
+              <a:buSzPct val="100000"/>
               <a:buChar char="•"/>
               <a:lnSpc>
                 <a:spcPts val="2200"/>
@@ -16748,10 +16938,12 @@
             </a:r>
           </a:p>
           <a:p>
-            <a:pPr>
+            <a:pPr lvl="0" marL="457200" indent="-228600">
+              <a:buFont typeface="Calibri"/>
               <a:spcAft>
                 <a:spcPts val="1000"/>
               </a:spcAft>
+              <a:buSzPct val="100000"/>
               <a:buChar char="•"/>
               <a:lnSpc>
                 <a:spcPts val="2200"/>
@@ -16887,10 +17079,12 @@
           </a:bodyPr>
           <a:lstStyle/>
           <a:p>
-            <a:pPr>
+            <a:pPr lvl="0" marL="457200" indent="-228600">
+              <a:buFont typeface="Calibri"/>
               <a:spcAft>
                 <a:spcPts val="1000"/>
               </a:spcAft>
+              <a:buSzPct val="100000"/>
               <a:buChar char="•"/>
               <a:lnSpc>
                 <a:spcPts val="2200"/>
@@ -16907,10 +17101,12 @@
             </a:r>
           </a:p>
           <a:p>
-            <a:pPr>
+            <a:pPr lvl="0" marL="457200" indent="-228600">
+              <a:buFont typeface="Calibri"/>
               <a:spcAft>
                 <a:spcPts val="1000"/>
               </a:spcAft>
+              <a:buSzPct val="100000"/>
               <a:buChar char="•"/>
               <a:lnSpc>
                 <a:spcPts val="2200"/>
@@ -16927,10 +17123,12 @@
             </a:r>
           </a:p>
           <a:p>
-            <a:pPr>
+            <a:pPr lvl="0" marL="457200" indent="-228600">
+              <a:buFont typeface="Calibri"/>
               <a:spcAft>
                 <a:spcPts val="1000"/>
               </a:spcAft>
+              <a:buSzPct val="100000"/>
               <a:buChar char="•"/>
               <a:lnSpc>
                 <a:spcPts val="2200"/>
@@ -17066,10 +17264,12 @@
           </a:bodyPr>
           <a:lstStyle/>
           <a:p>
-            <a:pPr>
+            <a:pPr lvl="0" marL="457200" indent="-228600">
+              <a:buFont typeface="Calibri"/>
               <a:spcAft>
                 <a:spcPts val="1000"/>
               </a:spcAft>
+              <a:buSzPct val="100000"/>
               <a:buChar char="•"/>
               <a:lnSpc>
                 <a:spcPts val="2200"/>
@@ -17086,10 +17286,12 @@
             </a:r>
           </a:p>
           <a:p>
-            <a:pPr>
+            <a:pPr lvl="0" marL="457200" indent="-228600">
+              <a:buFont typeface="Calibri"/>
               <a:spcAft>
                 <a:spcPts val="1000"/>
               </a:spcAft>
+              <a:buSzPct val="100000"/>
               <a:buChar char="•"/>
               <a:lnSpc>
                 <a:spcPts val="2200"/>
@@ -17106,10 +17308,12 @@
             </a:r>
           </a:p>
           <a:p>
-            <a:pPr>
+            <a:pPr lvl="0" marL="457200" indent="-228600">
+              <a:buFont typeface="Calibri"/>
               <a:spcAft>
                 <a:spcPts val="1000"/>
               </a:spcAft>
+              <a:buSzPct val="100000"/>
               <a:buChar char="•"/>
               <a:lnSpc>
                 <a:spcPts val="2200"/>
@@ -17126,10 +17330,12 @@
             </a:r>
           </a:p>
           <a:p>
-            <a:pPr>
+            <a:pPr lvl="0" marL="457200" indent="-228600">
+              <a:buFont typeface="Calibri"/>
               <a:spcAft>
                 <a:spcPts val="1000"/>
               </a:spcAft>
+              <a:buSzPct val="100000"/>
               <a:buChar char="•"/>
               <a:lnSpc>
                 <a:spcPts val="2200"/>
@@ -17146,10 +17352,12 @@
             </a:r>
           </a:p>
           <a:p>
-            <a:pPr>
+            <a:pPr lvl="0" marL="457200" indent="-228600">
+              <a:buFont typeface="Calibri"/>
               <a:spcAft>
                 <a:spcPts val="1000"/>
               </a:spcAft>
+              <a:buSzPct val="100000"/>
               <a:buChar char="•"/>
               <a:lnSpc>
                 <a:spcPts val="2200"/>
@@ -17285,10 +17493,12 @@
           </a:bodyPr>
           <a:lstStyle/>
           <a:p>
-            <a:pPr>
+            <a:pPr lvl="0" marL="457200" indent="-228600">
+              <a:buFont typeface="Calibri"/>
               <a:spcAft>
                 <a:spcPts val="1000"/>
               </a:spcAft>
+              <a:buSzPct val="100000"/>
               <a:buChar char="•"/>
               <a:lnSpc>
                 <a:spcPts val="2200"/>
@@ -17305,10 +17515,12 @@
             </a:r>
           </a:p>
           <a:p>
-            <a:pPr>
+            <a:pPr lvl="0" marL="457200" indent="-228600">
+              <a:buFont typeface="Calibri"/>
               <a:spcAft>
                 <a:spcPts val="1000"/>
               </a:spcAft>
+              <a:buSzPct val="100000"/>
               <a:buChar char="•"/>
               <a:lnSpc>
                 <a:spcPts val="2200"/>
@@ -17325,10 +17537,12 @@
             </a:r>
           </a:p>
           <a:p>
-            <a:pPr>
+            <a:pPr lvl="0" marL="457200" indent="-228600">
+              <a:buFont typeface="Calibri"/>
               <a:spcAft>
                 <a:spcPts val="1000"/>
               </a:spcAft>
+              <a:buSzPct val="100000"/>
               <a:buChar char="•"/>
               <a:lnSpc>
                 <a:spcPts val="2200"/>
@@ -17345,10 +17559,12 @@
             </a:r>
           </a:p>
           <a:p>
-            <a:pPr>
+            <a:pPr lvl="0" marL="457200" indent="-228600">
+              <a:buFont typeface="Calibri"/>
               <a:spcAft>
                 <a:spcPts val="1000"/>
               </a:spcAft>
+              <a:buSzPct val="100000"/>
               <a:buChar char="•"/>
               <a:lnSpc>
                 <a:spcPts val="2200"/>
@@ -17484,10 +17700,12 @@
           </a:bodyPr>
           <a:lstStyle/>
           <a:p>
-            <a:pPr>
+            <a:pPr lvl="0" marL="457200" indent="-228600">
+              <a:buFont typeface="Calibri"/>
               <a:spcAft>
                 <a:spcPts val="1000"/>
               </a:spcAft>
+              <a:buSzPct val="100000"/>
               <a:buChar char="•"/>
               <a:lnSpc>
                 <a:spcPts val="2200"/>
@@ -17504,10 +17722,12 @@
             </a:r>
           </a:p>
           <a:p>
-            <a:pPr>
+            <a:pPr lvl="0" marL="457200" indent="-228600">
+              <a:buFont typeface="Calibri"/>
               <a:spcAft>
                 <a:spcPts val="1000"/>
               </a:spcAft>
+              <a:buSzPct val="100000"/>
               <a:buChar char="•"/>
               <a:lnSpc>
                 <a:spcPts val="2200"/>
@@ -17524,10 +17744,12 @@
             </a:r>
           </a:p>
           <a:p>
-            <a:pPr>
+            <a:pPr lvl="0" marL="457200" indent="-228600">
+              <a:buFont typeface="Calibri"/>
               <a:spcAft>
                 <a:spcPts val="1000"/>
               </a:spcAft>
+              <a:buSzPct val="100000"/>
               <a:buChar char="•"/>
               <a:lnSpc>
                 <a:spcPts val="2200"/>
@@ -17544,10 +17766,12 @@
             </a:r>
           </a:p>
           <a:p>
-            <a:pPr>
+            <a:pPr lvl="0" marL="457200" indent="-228600">
+              <a:buFont typeface="Calibri"/>
               <a:spcAft>
                 <a:spcPts val="1000"/>
               </a:spcAft>
+              <a:buSzPct val="100000"/>
               <a:buChar char="•"/>
               <a:lnSpc>
                 <a:spcPts val="2200"/>
@@ -17564,10 +17788,12 @@
             </a:r>
           </a:p>
           <a:p>
-            <a:pPr>
+            <a:pPr lvl="0" marL="457200" indent="-228600">
+              <a:buFont typeface="Calibri"/>
               <a:spcAft>
                 <a:spcPts val="1000"/>
               </a:spcAft>
+              <a:buSzPct val="100000"/>
               <a:buChar char="•"/>
               <a:lnSpc>
                 <a:spcPts val="2200"/>
@@ -17703,10 +17929,12 @@
           </a:bodyPr>
           <a:lstStyle/>
           <a:p>
-            <a:pPr>
+            <a:pPr lvl="0" marL="457200" indent="-228600">
+              <a:buFont typeface="Calibri"/>
               <a:spcAft>
                 <a:spcPts val="1000"/>
               </a:spcAft>
+              <a:buSzPct val="100000"/>
               <a:buChar char="•"/>
               <a:lnSpc>
                 <a:spcPts val="2200"/>
@@ -17723,10 +17951,12 @@
             </a:r>
           </a:p>
           <a:p>
-            <a:pPr>
+            <a:pPr lvl="0" marL="457200" indent="-228600">
+              <a:buFont typeface="Calibri"/>
               <a:spcAft>
                 <a:spcPts val="1000"/>
               </a:spcAft>
+              <a:buSzPct val="100000"/>
               <a:buChar char="•"/>
               <a:lnSpc>
                 <a:spcPts val="2200"/>
@@ -17743,10 +17973,12 @@
             </a:r>
           </a:p>
           <a:p>
-            <a:pPr>
+            <a:pPr lvl="0" marL="457200" indent="-228600">
+              <a:buFont typeface="Calibri"/>
               <a:spcAft>
                 <a:spcPts val="1000"/>
               </a:spcAft>
+              <a:buSzPct val="100000"/>
               <a:buChar char="•"/>
               <a:lnSpc>
                 <a:spcPts val="2200"/>
@@ -17882,10 +18114,12 @@
           </a:bodyPr>
           <a:lstStyle/>
           <a:p>
-            <a:pPr>
+            <a:pPr lvl="0" marL="457200" indent="-228600">
+              <a:buFont typeface="Calibri"/>
               <a:spcAft>
                 <a:spcPts val="1000"/>
               </a:spcAft>
+              <a:buSzPct val="100000"/>
               <a:buChar char="•"/>
               <a:lnSpc>
                 <a:spcPts val="2200"/>
@@ -17902,10 +18136,12 @@
             </a:r>
           </a:p>
           <a:p>
-            <a:pPr>
+            <a:pPr lvl="0" marL="457200" indent="-228600">
+              <a:buFont typeface="Calibri"/>
               <a:spcAft>
                 <a:spcPts val="1000"/>
               </a:spcAft>
+              <a:buSzPct val="100000"/>
               <a:buChar char="•"/>
               <a:lnSpc>
                 <a:spcPts val="2200"/>
@@ -18041,10 +18277,12 @@
           </a:bodyPr>
           <a:lstStyle/>
           <a:p>
-            <a:pPr>
+            <a:pPr lvl="0" marL="457200" indent="-228600">
+              <a:buFont typeface="Calibri"/>
               <a:spcAft>
                 <a:spcPts val="1000"/>
               </a:spcAft>
+              <a:buSzPct val="100000"/>
               <a:buChar char="•"/>
               <a:lnSpc>
                 <a:spcPts val="2200"/>
@@ -18180,10 +18418,12 @@
           </a:bodyPr>
           <a:lstStyle/>
           <a:p>
-            <a:pPr>
+            <a:pPr lvl="0" marL="457200" indent="-228600">
+              <a:buFont typeface="Calibri"/>
               <a:spcAft>
                 <a:spcPts val="1000"/>
               </a:spcAft>
+              <a:buSzPct val="100000"/>
               <a:buChar char="•"/>
               <a:lnSpc>
                 <a:spcPts val="2200"/>
@@ -18200,10 +18440,12 @@
             </a:r>
           </a:p>
           <a:p>
-            <a:pPr>
+            <a:pPr lvl="0" marL="457200" indent="-228600">
+              <a:buFont typeface="Calibri"/>
               <a:spcAft>
                 <a:spcPts val="1000"/>
               </a:spcAft>
+              <a:buSzPct val="100000"/>
               <a:buChar char="•"/>
               <a:lnSpc>
                 <a:spcPts val="2200"/>
@@ -18339,10 +18581,12 @@
           </a:bodyPr>
           <a:lstStyle/>
           <a:p>
-            <a:pPr>
+            <a:pPr lvl="0" marL="457200" indent="-228600">
+              <a:buFont typeface="Calibri"/>
               <a:spcAft>
                 <a:spcPts val="1000"/>
               </a:spcAft>
+              <a:buSzPct val="100000"/>
               <a:buChar char="•"/>
               <a:lnSpc>
                 <a:spcPts val="2200"/>
@@ -18359,10 +18603,12 @@
             </a:r>
           </a:p>
           <a:p>
-            <a:pPr>
+            <a:pPr lvl="0" marL="457200" indent="-228600">
+              <a:buFont typeface="Calibri"/>
               <a:spcAft>
                 <a:spcPts val="1000"/>
               </a:spcAft>
+              <a:buSzPct val="100000"/>
               <a:buChar char="•"/>
               <a:lnSpc>
                 <a:spcPts val="2200"/>
@@ -18379,10 +18625,12 @@
             </a:r>
           </a:p>
           <a:p>
-            <a:pPr>
+            <a:pPr lvl="0" marL="457200" indent="-228600">
+              <a:buFont typeface="Calibri"/>
               <a:spcAft>
                 <a:spcPts val="1000"/>
               </a:spcAft>
+              <a:buSzPct val="100000"/>
               <a:buChar char="•"/>
               <a:lnSpc>
                 <a:spcPts val="2200"/>
@@ -18518,10 +18766,12 @@
           </a:bodyPr>
           <a:lstStyle/>
           <a:p>
-            <a:pPr>
+            <a:pPr lvl="0" marL="457200" indent="-228600">
+              <a:buFont typeface="Calibri"/>
               <a:spcAft>
                 <a:spcPts val="1000"/>
               </a:spcAft>
+              <a:buSzPct val="100000"/>
               <a:buChar char="•"/>
               <a:lnSpc>
                 <a:spcPts val="2200"/>
@@ -18538,10 +18788,12 @@
             </a:r>
           </a:p>
           <a:p>
-            <a:pPr>
+            <a:pPr lvl="0" marL="457200" indent="-228600">
+              <a:buFont typeface="Calibri"/>
               <a:spcAft>
                 <a:spcPts val="1000"/>
               </a:spcAft>
+              <a:buSzPct val="100000"/>
               <a:buChar char="•"/>
               <a:lnSpc>
                 <a:spcPts val="2200"/>
@@ -18558,10 +18810,12 @@
             </a:r>
           </a:p>
           <a:p>
-            <a:pPr>
+            <a:pPr lvl="0" marL="457200" indent="-228600">
+              <a:buFont typeface="Calibri"/>
               <a:spcAft>
                 <a:spcPts val="1000"/>
               </a:spcAft>
+              <a:buSzPct val="100000"/>
               <a:buChar char="•"/>
               <a:lnSpc>
                 <a:spcPts val="2200"/>
@@ -18697,10 +18951,12 @@
           </a:bodyPr>
           <a:lstStyle/>
           <a:p>
-            <a:pPr>
+            <a:pPr lvl="0" marL="457200" indent="-228600">
+              <a:buFont typeface="Calibri"/>
               <a:spcAft>
                 <a:spcPts val="1000"/>
               </a:spcAft>
+              <a:buSzPct val="100000"/>
               <a:buChar char="•"/>
               <a:lnSpc>
                 <a:spcPts val="2200"/>
@@ -18717,10 +18973,12 @@
             </a:r>
           </a:p>
           <a:p>
-            <a:pPr>
+            <a:pPr lvl="0" marL="457200" indent="-228600">
+              <a:buFont typeface="Calibri"/>
               <a:spcAft>
                 <a:spcPts val="1000"/>
               </a:spcAft>
+              <a:buSzPct val="100000"/>
               <a:buChar char="•"/>
               <a:lnSpc>
                 <a:spcPts val="2200"/>
@@ -18737,10 +18995,12 @@
             </a:r>
           </a:p>
           <a:p>
-            <a:pPr>
+            <a:pPr lvl="0" marL="457200" indent="-228600">
+              <a:buFont typeface="Calibri"/>
               <a:spcAft>
                 <a:spcPts val="1000"/>
               </a:spcAft>
+              <a:buSzPct val="100000"/>
               <a:buChar char="•"/>
               <a:lnSpc>
                 <a:spcPts val="2200"/>
@@ -18876,10 +19136,12 @@
           </a:bodyPr>
           <a:lstStyle/>
           <a:p>
-            <a:pPr>
+            <a:pPr lvl="0" marL="457200" indent="-228600">
+              <a:buFont typeface="Calibri"/>
               <a:spcAft>
                 <a:spcPts val="1000"/>
               </a:spcAft>
+              <a:buSzPct val="100000"/>
               <a:buChar char="•"/>
               <a:lnSpc>
                 <a:spcPts val="2200"/>
@@ -18896,10 +19158,12 @@
             </a:r>
           </a:p>
           <a:p>
-            <a:pPr>
+            <a:pPr lvl="0" marL="457200" indent="-228600">
+              <a:buFont typeface="Calibri"/>
               <a:spcAft>
                 <a:spcPts val="1000"/>
               </a:spcAft>
+              <a:buSzPct val="100000"/>
               <a:buChar char="•"/>
               <a:lnSpc>
                 <a:spcPts val="2200"/>
@@ -19035,10 +19299,12 @@
           </a:bodyPr>
           <a:lstStyle/>
           <a:p>
-            <a:pPr>
+            <a:pPr lvl="0" marL="457200" indent="-228600">
+              <a:buFont typeface="Calibri"/>
               <a:spcAft>
                 <a:spcPts val="1000"/>
               </a:spcAft>
+              <a:buSzPct val="100000"/>
               <a:buChar char="•"/>
               <a:lnSpc>
                 <a:spcPts val="2200"/>
@@ -19055,10 +19321,12 @@
             </a:r>
           </a:p>
           <a:p>
-            <a:pPr>
+            <a:pPr lvl="0" marL="457200" indent="-228600">
+              <a:buFont typeface="Calibri"/>
               <a:spcAft>
                 <a:spcPts val="1000"/>
               </a:spcAft>
+              <a:buSzPct val="100000"/>
               <a:buChar char="•"/>
               <a:lnSpc>
                 <a:spcPts val="2200"/>
@@ -19075,10 +19343,12 @@
             </a:r>
           </a:p>
           <a:p>
-            <a:pPr>
+            <a:pPr lvl="0" marL="457200" indent="-228600">
+              <a:buFont typeface="Calibri"/>
               <a:spcAft>
                 <a:spcPts val="1000"/>
               </a:spcAft>
+              <a:buSzPct val="100000"/>
               <a:buChar char="•"/>
               <a:lnSpc>
                 <a:spcPts val="2200"/>
@@ -19214,10 +19484,12 @@
           </a:bodyPr>
           <a:lstStyle/>
           <a:p>
-            <a:pPr>
+            <a:pPr lvl="0" marL="457200" indent="-228600">
+              <a:buFont typeface="Calibri"/>
               <a:spcAft>
                 <a:spcPts val="1000"/>
               </a:spcAft>
+              <a:buSzPct val="100000"/>
               <a:buChar char="•"/>
               <a:lnSpc>
                 <a:spcPts val="2200"/>
@@ -19234,10 +19506,12 @@
             </a:r>
           </a:p>
           <a:p>
-            <a:pPr>
+            <a:pPr lvl="0" marL="457200" indent="-228600">
+              <a:buFont typeface="Calibri"/>
               <a:spcAft>
                 <a:spcPts val="1000"/>
               </a:spcAft>
+              <a:buSzPct val="100000"/>
               <a:buChar char="•"/>
               <a:lnSpc>
                 <a:spcPts val="2200"/>
@@ -19254,10 +19528,12 @@
             </a:r>
           </a:p>
           <a:p>
-            <a:pPr>
+            <a:pPr lvl="0" marL="457200" indent="-228600">
+              <a:buFont typeface="Calibri"/>
               <a:spcAft>
                 <a:spcPts val="1000"/>
               </a:spcAft>
+              <a:buSzPct val="100000"/>
               <a:buChar char="•"/>
               <a:lnSpc>
                 <a:spcPts val="2200"/>
@@ -19393,10 +19669,12 @@
           </a:bodyPr>
           <a:lstStyle/>
           <a:p>
-            <a:pPr>
+            <a:pPr lvl="0" marL="457200" indent="-228600">
+              <a:buFont typeface="Calibri"/>
               <a:spcAft>
                 <a:spcPts val="1000"/>
               </a:spcAft>
+              <a:buSzPct val="100000"/>
               <a:buChar char="•"/>
               <a:lnSpc>
                 <a:spcPts val="2200"/>
@@ -19413,10 +19691,12 @@
             </a:r>
           </a:p>
           <a:p>
-            <a:pPr>
+            <a:pPr lvl="0" marL="457200" indent="-228600">
+              <a:buFont typeface="Calibri"/>
               <a:spcAft>
                 <a:spcPts val="1000"/>
               </a:spcAft>
+              <a:buSzPct val="100000"/>
               <a:buChar char="•"/>
               <a:lnSpc>
                 <a:spcPts val="2200"/>
@@ -19433,10 +19713,12 @@
             </a:r>
           </a:p>
           <a:p>
-            <a:pPr>
+            <a:pPr lvl="0" marL="457200" indent="-228600">
+              <a:buFont typeface="Calibri"/>
               <a:spcAft>
                 <a:spcPts val="1000"/>
               </a:spcAft>
+              <a:buSzPct val="100000"/>
               <a:buChar char="•"/>
               <a:lnSpc>
                 <a:spcPts val="2200"/>
@@ -19572,10 +19854,12 @@
           </a:bodyPr>
           <a:lstStyle/>
           <a:p>
-            <a:pPr>
+            <a:pPr lvl="0" marL="457200" indent="-228600">
+              <a:buFont typeface="Calibri"/>
               <a:spcAft>
                 <a:spcPts val="1000"/>
               </a:spcAft>
+              <a:buSzPct val="100000"/>
               <a:buChar char="•"/>
               <a:lnSpc>
                 <a:spcPts val="2200"/>
@@ -19592,10 +19876,12 @@
             </a:r>
           </a:p>
           <a:p>
-            <a:pPr>
+            <a:pPr lvl="0" marL="457200" indent="-228600">
+              <a:buFont typeface="Calibri"/>
               <a:spcAft>
                 <a:spcPts val="1000"/>
               </a:spcAft>
+              <a:buSzPct val="100000"/>
               <a:buChar char="•"/>
               <a:lnSpc>
                 <a:spcPts val="2200"/>
@@ -19731,10 +20017,12 @@
           </a:bodyPr>
           <a:lstStyle/>
           <a:p>
-            <a:pPr>
+            <a:pPr lvl="0" marL="457200" indent="-228600">
+              <a:buFont typeface="Calibri"/>
               <a:spcAft>
                 <a:spcPts val="1000"/>
               </a:spcAft>
+              <a:buSzPct val="100000"/>
               <a:buChar char="•"/>
               <a:lnSpc>
                 <a:spcPts val="2200"/>
@@ -19870,10 +20158,12 @@
           </a:bodyPr>
           <a:lstStyle/>
           <a:p>
-            <a:pPr>
+            <a:pPr lvl="0" marL="457200" indent="-228600">
+              <a:buFont typeface="Calibri"/>
               <a:spcAft>
                 <a:spcPts val="1000"/>
               </a:spcAft>
+              <a:buSzPct val="100000"/>
               <a:buChar char="•"/>
               <a:lnSpc>
                 <a:spcPts val="2200"/>
@@ -19890,10 +20180,12 @@
             </a:r>
           </a:p>
           <a:p>
-            <a:pPr>
+            <a:pPr lvl="0" marL="457200" indent="-228600">
+              <a:buFont typeface="Calibri"/>
               <a:spcAft>
                 <a:spcPts val="1000"/>
               </a:spcAft>
+              <a:buSzPct val="100000"/>
               <a:buChar char="•"/>
               <a:lnSpc>
                 <a:spcPts val="2200"/>
@@ -19910,10 +20202,12 @@
             </a:r>
           </a:p>
           <a:p>
-            <a:pPr>
+            <a:pPr lvl="0" marL="457200" indent="-228600">
+              <a:buFont typeface="Calibri"/>
               <a:spcAft>
                 <a:spcPts val="1000"/>
               </a:spcAft>
+              <a:buSzPct val="100000"/>
               <a:buChar char="•"/>
               <a:lnSpc>
                 <a:spcPts val="2200"/>
@@ -20049,10 +20343,12 @@
           </a:bodyPr>
           <a:lstStyle/>
           <a:p>
-            <a:pPr>
+            <a:pPr lvl="0" marL="457200" indent="-228600">
+              <a:buFont typeface="Calibri"/>
               <a:spcAft>
                 <a:spcPts val="1000"/>
               </a:spcAft>
+              <a:buSzPct val="100000"/>
               <a:buChar char="•"/>
               <a:lnSpc>
                 <a:spcPts val="2200"/>
@@ -20069,10 +20365,12 @@
             </a:r>
           </a:p>
           <a:p>
-            <a:pPr>
+            <a:pPr lvl="0" marL="457200" indent="-228600">
+              <a:buFont typeface="Calibri"/>
               <a:spcAft>
                 <a:spcPts val="1000"/>
               </a:spcAft>
+              <a:buSzPct val="100000"/>
               <a:buChar char="•"/>
               <a:lnSpc>
                 <a:spcPts val="2200"/>
@@ -20089,10 +20387,12 @@
             </a:r>
           </a:p>
           <a:p>
-            <a:pPr>
+            <a:pPr lvl="0" marL="457200" indent="-228600">
+              <a:buFont typeface="Calibri"/>
               <a:spcAft>
                 <a:spcPts val="1000"/>
               </a:spcAft>
+              <a:buSzPct val="100000"/>
               <a:buChar char="•"/>
               <a:lnSpc>
                 <a:spcPts val="2200"/>
@@ -20109,10 +20409,12 @@
             </a:r>
           </a:p>
           <a:p>
-            <a:pPr>
+            <a:pPr lvl="0" marL="457200" indent="-228600">
+              <a:buFont typeface="Calibri"/>
               <a:spcAft>
                 <a:spcPts val="1000"/>
               </a:spcAft>
+              <a:buSzPct val="100000"/>
               <a:buChar char="•"/>
               <a:lnSpc>
                 <a:spcPts val="2200"/>
@@ -20129,10 +20431,12 @@
             </a:r>
           </a:p>
           <a:p>
-            <a:pPr>
+            <a:pPr lvl="0" marL="457200" indent="-228600">
+              <a:buFont typeface="Calibri"/>
               <a:spcAft>
                 <a:spcPts val="1000"/>
               </a:spcAft>
+              <a:buSzPct val="100000"/>
               <a:buChar char="•"/>
               <a:lnSpc>
                 <a:spcPts val="2200"/>
@@ -20731,10 +21035,12 @@
           </a:bodyPr>
           <a:lstStyle/>
           <a:p>
-            <a:pPr>
+            <a:pPr lvl="0" marL="457200" indent="-228600">
+              <a:buFont typeface="Calibri"/>
               <a:spcAft>
                 <a:spcPts val="1000"/>
               </a:spcAft>
+              <a:buSzPct val="100000"/>
               <a:buChar char="•"/>
               <a:lnSpc>
                 <a:spcPts val="2200"/>
@@ -20751,10 +21057,12 @@
             </a:r>
           </a:p>
           <a:p>
-            <a:pPr>
+            <a:pPr lvl="0" marL="457200" indent="-228600">
+              <a:buFont typeface="Calibri"/>
               <a:spcAft>
                 <a:spcPts val="1000"/>
               </a:spcAft>
+              <a:buSzPct val="100000"/>
               <a:buChar char="•"/>
               <a:lnSpc>
                 <a:spcPts val="2200"/>
@@ -20771,10 +21079,12 @@
             </a:r>
           </a:p>
           <a:p>
-            <a:pPr>
+            <a:pPr lvl="0" marL="457200" indent="-228600">
+              <a:buFont typeface="Calibri"/>
               <a:spcAft>
                 <a:spcPts val="1000"/>
               </a:spcAft>
+              <a:buSzPct val="100000"/>
               <a:buChar char="•"/>
               <a:lnSpc>
                 <a:spcPts val="2200"/>
@@ -20910,10 +21220,12 @@
           </a:bodyPr>
           <a:lstStyle/>
           <a:p>
-            <a:pPr>
+            <a:pPr lvl="0" marL="457200" indent="-228600">
+              <a:buFont typeface="Calibri"/>
               <a:spcAft>
                 <a:spcPts val="1000"/>
               </a:spcAft>
+              <a:buSzPct val="100000"/>
               <a:buChar char="•"/>
               <a:lnSpc>
                 <a:spcPts val="2200"/>
@@ -20930,10 +21242,12 @@
             </a:r>
           </a:p>
           <a:p>
-            <a:pPr>
+            <a:pPr lvl="0" marL="457200" indent="-228600">
+              <a:buFont typeface="Calibri"/>
               <a:spcAft>
                 <a:spcPts val="1000"/>
               </a:spcAft>
+              <a:buSzPct val="100000"/>
               <a:buChar char="•"/>
               <a:lnSpc>
                 <a:spcPts val="2200"/>
@@ -20950,10 +21264,12 @@
             </a:r>
           </a:p>
           <a:p>
-            <a:pPr>
+            <a:pPr lvl="0" marL="457200" indent="-228600">
+              <a:buFont typeface="Calibri"/>
               <a:spcAft>
                 <a:spcPts val="1000"/>
               </a:spcAft>
+              <a:buSzPct val="100000"/>
               <a:buChar char="•"/>
               <a:lnSpc>
                 <a:spcPts val="2200"/>
@@ -21089,10 +21405,12 @@
           </a:bodyPr>
           <a:lstStyle/>
           <a:p>
-            <a:pPr>
+            <a:pPr lvl="0" marL="457200" indent="-228600">
+              <a:buFont typeface="Calibri"/>
               <a:spcAft>
                 <a:spcPts val="1000"/>
               </a:spcAft>
+              <a:buSzPct val="100000"/>
               <a:buChar char="•"/>
               <a:lnSpc>
                 <a:spcPts val="2200"/>
@@ -21109,10 +21427,12 @@
             </a:r>
           </a:p>
           <a:p>
-            <a:pPr>
+            <a:pPr lvl="0" marL="457200" indent="-228600">
+              <a:buFont typeface="Calibri"/>
               <a:spcAft>
                 <a:spcPts val="1000"/>
               </a:spcAft>
+              <a:buSzPct val="100000"/>
               <a:buChar char="•"/>
               <a:lnSpc>
                 <a:spcPts val="2200"/>
@@ -21129,10 +21449,12 @@
             </a:r>
           </a:p>
           <a:p>
-            <a:pPr>
+            <a:pPr lvl="0" marL="457200" indent="-228600">
+              <a:buFont typeface="Calibri"/>
               <a:spcAft>
                 <a:spcPts val="1000"/>
               </a:spcAft>
+              <a:buSzPct val="100000"/>
               <a:buChar char="•"/>
               <a:lnSpc>
                 <a:spcPts val="2200"/>
@@ -21268,10 +21590,12 @@
           </a:bodyPr>
           <a:lstStyle/>
           <a:p>
-            <a:pPr>
+            <a:pPr lvl="0" marL="457200" indent="-228600">
+              <a:buFont typeface="Calibri"/>
               <a:spcAft>
                 <a:spcPts val="1000"/>
               </a:spcAft>
+              <a:buSzPct val="100000"/>
               <a:buChar char="•"/>
               <a:lnSpc>
                 <a:spcPts val="2200"/>
@@ -21288,10 +21612,12 @@
             </a:r>
           </a:p>
           <a:p>
-            <a:pPr>
+            <a:pPr lvl="0" marL="457200" indent="-228600">
+              <a:buFont typeface="Calibri"/>
               <a:spcAft>
                 <a:spcPts val="1000"/>
               </a:spcAft>
+              <a:buSzPct val="100000"/>
               <a:buChar char="•"/>
               <a:lnSpc>
                 <a:spcPts val="2200"/>
@@ -21308,10 +21634,12 @@
             </a:r>
           </a:p>
           <a:p>
-            <a:pPr>
+            <a:pPr lvl="0" marL="457200" indent="-228600">
+              <a:buFont typeface="Calibri"/>
               <a:spcAft>
                 <a:spcPts val="1000"/>
               </a:spcAft>
+              <a:buSzPct val="100000"/>
               <a:buChar char="•"/>
               <a:lnSpc>
                 <a:spcPts val="2200"/>
@@ -21447,10 +21775,12 @@
           </a:bodyPr>
           <a:lstStyle/>
           <a:p>
-            <a:pPr>
+            <a:pPr lvl="0" marL="457200" indent="-228600">
+              <a:buFont typeface="Calibri"/>
               <a:spcAft>
                 <a:spcPts val="1000"/>
               </a:spcAft>
+              <a:buSzPct val="100000"/>
               <a:buChar char="•"/>
               <a:lnSpc>
                 <a:spcPts val="2200"/>
@@ -21467,10 +21797,12 @@
             </a:r>
           </a:p>
           <a:p>
-            <a:pPr>
+            <a:pPr lvl="0" marL="457200" indent="-228600">
+              <a:buFont typeface="Calibri"/>
               <a:spcAft>
                 <a:spcPts val="1000"/>
               </a:spcAft>
+              <a:buSzPct val="100000"/>
               <a:buChar char="•"/>
               <a:lnSpc>
                 <a:spcPts val="2200"/>
@@ -21606,10 +21938,12 @@
           </a:bodyPr>
           <a:lstStyle/>
           <a:p>
-            <a:pPr>
+            <a:pPr lvl="0" marL="457200" indent="-228600">
+              <a:buFont typeface="Calibri"/>
               <a:spcAft>
                 <a:spcPts val="1000"/>
               </a:spcAft>
+              <a:buSzPct val="100000"/>
               <a:buChar char="•"/>
               <a:lnSpc>
                 <a:spcPts val="2200"/>
@@ -21626,10 +21960,12 @@
             </a:r>
           </a:p>
           <a:p>
-            <a:pPr>
+            <a:pPr lvl="0" marL="457200" indent="-228600">
+              <a:buFont typeface="Calibri"/>
               <a:spcAft>
                 <a:spcPts val="1000"/>
               </a:spcAft>
+              <a:buSzPct val="100000"/>
               <a:buChar char="•"/>
               <a:lnSpc>
                 <a:spcPts val="2200"/>
@@ -21646,10 +21982,12 @@
             </a:r>
           </a:p>
           <a:p>
-            <a:pPr>
+            <a:pPr lvl="0" marL="457200" indent="-228600">
+              <a:buFont typeface="Calibri"/>
               <a:spcAft>
                 <a:spcPts val="1000"/>
               </a:spcAft>
+              <a:buSzPct val="100000"/>
               <a:buChar char="•"/>
               <a:lnSpc>
                 <a:spcPts val="2200"/>
@@ -21785,10 +22123,12 @@
           </a:bodyPr>
           <a:lstStyle/>
           <a:p>
-            <a:pPr>
+            <a:pPr lvl="0" marL="457200" indent="-228600">
+              <a:buFont typeface="Calibri"/>
               <a:spcAft>
                 <a:spcPts val="1000"/>
               </a:spcAft>
+              <a:buSzPct val="100000"/>
               <a:buChar char="•"/>
               <a:lnSpc>
                 <a:spcPts val="2200"/>
@@ -21805,10 +22145,12 @@
             </a:r>
           </a:p>
           <a:p>
-            <a:pPr>
+            <a:pPr lvl="0" marL="457200" indent="-228600">
+              <a:buFont typeface="Calibri"/>
               <a:spcAft>
                 <a:spcPts val="1000"/>
               </a:spcAft>
+              <a:buSzPct val="100000"/>
               <a:buChar char="•"/>
               <a:lnSpc>
                 <a:spcPts val="2200"/>
@@ -21944,10 +22286,12 @@
           </a:bodyPr>
           <a:lstStyle/>
           <a:p>
-            <a:pPr>
+            <a:pPr lvl="0" marL="457200" indent="-228600">
+              <a:buFont typeface="Calibri"/>
               <a:spcAft>
                 <a:spcPts val="1000"/>
               </a:spcAft>
+              <a:buSzPct val="100000"/>
               <a:buChar char="•"/>
               <a:lnSpc>
                 <a:spcPts val="2200"/>
@@ -22083,10 +22427,12 @@
           </a:bodyPr>
           <a:lstStyle/>
           <a:p>
-            <a:pPr>
+            <a:pPr lvl="0" marL="457200" indent="-228600">
+              <a:buFont typeface="Calibri"/>
               <a:spcAft>
                 <a:spcPts val="1000"/>
               </a:spcAft>
+              <a:buSzPct val="100000"/>
               <a:buChar char="•"/>
               <a:lnSpc>
                 <a:spcPts val="2200"/>
@@ -22103,10 +22449,12 @@
             </a:r>
           </a:p>
           <a:p>
-            <a:pPr>
+            <a:pPr lvl="0" marL="457200" indent="-228600">
+              <a:buFont typeface="Calibri"/>
               <a:spcAft>
                 <a:spcPts val="1000"/>
               </a:spcAft>
+              <a:buSzPct val="100000"/>
               <a:buChar char="•"/>
               <a:lnSpc>
                 <a:spcPts val="2200"/>
@@ -22123,10 +22471,12 @@
             </a:r>
           </a:p>
           <a:p>
-            <a:pPr>
+            <a:pPr lvl="0" marL="457200" indent="-228600">
+              <a:buFont typeface="Calibri"/>
               <a:spcAft>
                 <a:spcPts val="1000"/>
               </a:spcAft>
+              <a:buSzPct val="100000"/>
               <a:buChar char="•"/>
               <a:lnSpc>
                 <a:spcPts val="2200"/>
@@ -22262,10 +22612,12 @@
           </a:bodyPr>
           <a:lstStyle/>
           <a:p>
-            <a:pPr>
+            <a:pPr lvl="0" marL="457200" indent="-228600">
+              <a:buFont typeface="Calibri"/>
               <a:spcAft>
                 <a:spcPts val="1000"/>
               </a:spcAft>
+              <a:buSzPct val="100000"/>
               <a:buChar char="•"/>
               <a:lnSpc>
                 <a:spcPts val="2200"/>
@@ -22282,10 +22634,12 @@
             </a:r>
           </a:p>
           <a:p>
-            <a:pPr>
+            <a:pPr lvl="0" marL="457200" indent="-228600">
+              <a:buFont typeface="Calibri"/>
               <a:spcAft>
                 <a:spcPts val="1000"/>
               </a:spcAft>
+              <a:buSzPct val="100000"/>
               <a:buChar char="•"/>
               <a:lnSpc>
                 <a:spcPts val="2200"/>
@@ -22302,10 +22656,12 @@
             </a:r>
           </a:p>
           <a:p>
-            <a:pPr>
+            <a:pPr lvl="0" marL="457200" indent="-228600">
+              <a:buFont typeface="Calibri"/>
               <a:spcAft>
                 <a:spcPts val="1000"/>
               </a:spcAft>
+              <a:buSzPct val="100000"/>
               <a:buChar char="•"/>
               <a:lnSpc>
                 <a:spcPts val="2200"/>
@@ -22441,10 +22797,12 @@
           </a:bodyPr>
           <a:lstStyle/>
           <a:p>
-            <a:pPr>
+            <a:pPr lvl="0" marL="457200" indent="-228600">
+              <a:buFont typeface="Calibri"/>
               <a:spcAft>
                 <a:spcPts val="1000"/>
               </a:spcAft>
+              <a:buSzPct val="100000"/>
               <a:buChar char="•"/>
               <a:lnSpc>
                 <a:spcPts val="2200"/>
@@ -22461,10 +22819,12 @@
             </a:r>
           </a:p>
           <a:p>
-            <a:pPr>
+            <a:pPr lvl="0" marL="457200" indent="-228600">
+              <a:buFont typeface="Calibri"/>
               <a:spcAft>
                 <a:spcPts val="1000"/>
               </a:spcAft>
+              <a:buSzPct val="100000"/>
               <a:buChar char="•"/>
               <a:lnSpc>
                 <a:spcPts val="2200"/>
@@ -22600,10 +22960,12 @@
           </a:bodyPr>
           <a:lstStyle/>
           <a:p>
-            <a:pPr>
+            <a:pPr lvl="0" marL="457200" indent="-228600">
+              <a:buFont typeface="Calibri"/>
               <a:spcAft>
                 <a:spcPts val="1000"/>
               </a:spcAft>
+              <a:buSzPct val="100000"/>
               <a:buChar char="•"/>
               <a:lnSpc>
                 <a:spcPts val="2200"/>
@@ -22620,10 +22982,12 @@
             </a:r>
           </a:p>
           <a:p>
-            <a:pPr>
+            <a:pPr lvl="0" marL="457200" indent="-228600">
+              <a:buFont typeface="Calibri"/>
               <a:spcAft>
                 <a:spcPts val="1000"/>
               </a:spcAft>
+              <a:buSzPct val="100000"/>
               <a:buChar char="•"/>
               <a:lnSpc>
                 <a:spcPts val="2200"/>
@@ -22640,10 +23004,12 @@
             </a:r>
           </a:p>
           <a:p>
-            <a:pPr>
+            <a:pPr lvl="0" marL="457200" indent="-228600">
+              <a:buFont typeface="Calibri"/>
               <a:spcAft>
                 <a:spcPts val="1000"/>
               </a:spcAft>
+              <a:buSzPct val="100000"/>
               <a:buChar char="•"/>
               <a:lnSpc>
                 <a:spcPts val="2200"/>
@@ -22779,10 +23145,12 @@
           </a:bodyPr>
           <a:lstStyle/>
           <a:p>
-            <a:pPr>
+            <a:pPr lvl="0" marL="457200" indent="-228600">
+              <a:buFont typeface="Calibri"/>
               <a:spcAft>
                 <a:spcPts val="1000"/>
               </a:spcAft>
+              <a:buSzPct val="100000"/>
               <a:buChar char="•"/>
               <a:lnSpc>
                 <a:spcPts val="2200"/>
@@ -22799,10 +23167,12 @@
             </a:r>
           </a:p>
           <a:p>
-            <a:pPr>
+            <a:pPr lvl="0" marL="457200" indent="-228600">
+              <a:buFont typeface="Calibri"/>
               <a:spcAft>
                 <a:spcPts val="1000"/>
               </a:spcAft>
+              <a:buSzPct val="100000"/>
               <a:buChar char="•"/>
               <a:lnSpc>
                 <a:spcPts val="2200"/>
@@ -22819,10 +23189,12 @@
             </a:r>
           </a:p>
           <a:p>
-            <a:pPr>
+            <a:pPr lvl="0" marL="457200" indent="-228600">
+              <a:buFont typeface="Calibri"/>
               <a:spcAft>
                 <a:spcPts val="1000"/>
               </a:spcAft>
+              <a:buSzPct val="100000"/>
               <a:buChar char="•"/>
               <a:lnSpc>
                 <a:spcPts val="2200"/>
@@ -22958,10 +23330,12 @@
           </a:bodyPr>
           <a:lstStyle/>
           <a:p>
-            <a:pPr>
+            <a:pPr lvl="0" marL="457200" indent="-228600">
+              <a:buFont typeface="Calibri"/>
               <a:spcAft>
                 <a:spcPts val="1000"/>
               </a:spcAft>
+              <a:buSzPct val="100000"/>
               <a:buChar char="•"/>
               <a:lnSpc>
                 <a:spcPts val="2200"/>
@@ -22978,10 +23352,12 @@
             </a:r>
           </a:p>
           <a:p>
-            <a:pPr>
+            <a:pPr lvl="0" marL="457200" indent="-228600">
+              <a:buFont typeface="Calibri"/>
               <a:spcAft>
                 <a:spcPts val="1000"/>
               </a:spcAft>
+              <a:buSzPct val="100000"/>
               <a:buChar char="•"/>
               <a:lnSpc>
                 <a:spcPts val="2200"/>
@@ -22998,10 +23374,12 @@
             </a:r>
           </a:p>
           <a:p>
-            <a:pPr>
+            <a:pPr lvl="0" marL="457200" indent="-228600">
+              <a:buFont typeface="Calibri"/>
               <a:spcAft>
                 <a:spcPts val="1000"/>
               </a:spcAft>
+              <a:buSzPct val="100000"/>
               <a:buChar char="•"/>
               <a:lnSpc>
                 <a:spcPts val="2200"/>
@@ -23018,10 +23396,12 @@
             </a:r>
           </a:p>
           <a:p>
-            <a:pPr>
+            <a:pPr lvl="0" marL="457200" indent="-228600">
+              <a:buFont typeface="Calibri"/>
               <a:spcAft>
                 <a:spcPts val="1000"/>
               </a:spcAft>
+              <a:buSzPct val="100000"/>
               <a:buChar char="•"/>
               <a:lnSpc>
                 <a:spcPts val="2200"/>
@@ -23038,10 +23418,12 @@
             </a:r>
           </a:p>
           <a:p>
-            <a:pPr>
+            <a:pPr lvl="0" marL="457200" indent="-228600">
+              <a:buFont typeface="Calibri"/>
               <a:spcAft>
                 <a:spcPts val="1000"/>
               </a:spcAft>
+              <a:buSzPct val="100000"/>
               <a:buChar char="•"/>
               <a:lnSpc>
                 <a:spcPts val="2200"/>
@@ -23177,10 +23559,12 @@
           </a:bodyPr>
           <a:lstStyle/>
           <a:p>
-            <a:pPr>
+            <a:pPr lvl="0" marL="457200" indent="-228600">
+              <a:buFont typeface="Calibri"/>
               <a:spcAft>
                 <a:spcPts val="1000"/>
               </a:spcAft>
+              <a:buSzPct val="100000"/>
               <a:buChar char="•"/>
               <a:lnSpc>
                 <a:spcPts val="2200"/>
@@ -23197,10 +23581,12 @@
             </a:r>
           </a:p>
           <a:p>
-            <a:pPr>
+            <a:pPr lvl="0" marL="457200" indent="-228600">
+              <a:buFont typeface="Calibri"/>
               <a:spcAft>
                 <a:spcPts val="1000"/>
               </a:spcAft>
+              <a:buSzPct val="100000"/>
               <a:buChar char="•"/>
               <a:lnSpc>
                 <a:spcPts val="2200"/>
@@ -23217,10 +23603,12 @@
             </a:r>
           </a:p>
           <a:p>
-            <a:pPr>
+            <a:pPr lvl="0" marL="457200" indent="-228600">
+              <a:buFont typeface="Calibri"/>
               <a:spcAft>
                 <a:spcPts val="1000"/>
               </a:spcAft>
+              <a:buSzPct val="100000"/>
               <a:buChar char="•"/>
               <a:lnSpc>
                 <a:spcPts val="2200"/>
@@ -23356,10 +23744,12 @@
           </a:bodyPr>
           <a:lstStyle/>
           <a:p>
-            <a:pPr>
+            <a:pPr lvl="0" marL="457200" indent="-228600">
+              <a:buFont typeface="Calibri"/>
               <a:spcAft>
                 <a:spcPts val="1000"/>
               </a:spcAft>
+              <a:buSzPct val="100000"/>
               <a:buChar char="•"/>
               <a:lnSpc>
                 <a:spcPts val="2200"/>
@@ -23376,10 +23766,12 @@
             </a:r>
           </a:p>
           <a:p>
-            <a:pPr>
+            <a:pPr lvl="0" marL="457200" indent="-228600">
+              <a:buFont typeface="Calibri"/>
               <a:spcAft>
                 <a:spcPts val="1000"/>
               </a:spcAft>
+              <a:buSzPct val="100000"/>
               <a:buChar char="•"/>
               <a:lnSpc>
                 <a:spcPts val="2200"/>
@@ -23515,10 +23907,12 @@
           </a:bodyPr>
           <a:lstStyle/>
           <a:p>
-            <a:pPr>
+            <a:pPr lvl="0" marL="457200" indent="-228600">
+              <a:buFont typeface="Calibri"/>
               <a:spcAft>
                 <a:spcPts val="1000"/>
               </a:spcAft>
+              <a:buSzPct val="100000"/>
               <a:buChar char="•"/>
               <a:lnSpc>
                 <a:spcPts val="2200"/>
@@ -23535,10 +23929,12 @@
             </a:r>
           </a:p>
           <a:p>
-            <a:pPr>
+            <a:pPr lvl="0" marL="457200" indent="-228600">
+              <a:buFont typeface="Calibri"/>
               <a:spcAft>
                 <a:spcPts val="1000"/>
               </a:spcAft>
+              <a:buSzPct val="100000"/>
               <a:buChar char="•"/>
               <a:lnSpc>
                 <a:spcPts val="2200"/>
@@ -23674,10 +24070,12 @@
           </a:bodyPr>
           <a:lstStyle/>
           <a:p>
-            <a:pPr>
+            <a:pPr lvl="0" marL="457200" indent="-228600">
+              <a:buFont typeface="Calibri"/>
               <a:spcAft>
                 <a:spcPts val="1000"/>
               </a:spcAft>
+              <a:buSzPct val="100000"/>
               <a:buChar char="•"/>
               <a:lnSpc>
                 <a:spcPts val="2200"/>
@@ -23813,10 +24211,12 @@
           </a:bodyPr>
           <a:lstStyle/>
           <a:p>
-            <a:pPr>
+            <a:pPr lvl="0" marL="457200" indent="-228600">
+              <a:buFont typeface="Calibri"/>
               <a:spcAft>
                 <a:spcPts val="1000"/>
               </a:spcAft>
+              <a:buSzPct val="100000"/>
               <a:buChar char="•"/>
               <a:lnSpc>
                 <a:spcPts val="2200"/>
@@ -23833,10 +24233,12 @@
             </a:r>
           </a:p>
           <a:p>
-            <a:pPr>
+            <a:pPr lvl="0" marL="457200" indent="-228600">
+              <a:buFont typeface="Calibri"/>
               <a:spcAft>
                 <a:spcPts val="1000"/>
               </a:spcAft>
+              <a:buSzPct val="100000"/>
               <a:buChar char="•"/>
               <a:lnSpc>
                 <a:spcPts val="2200"/>
@@ -23972,10 +24374,12 @@
           </a:bodyPr>
           <a:lstStyle/>
           <a:p>
-            <a:pPr>
+            <a:pPr lvl="0" marL="457200" indent="-228600">
+              <a:buFont typeface="Calibri"/>
               <a:spcAft>
                 <a:spcPts val="1000"/>
               </a:spcAft>
+              <a:buSzPct val="100000"/>
               <a:buChar char="•"/>
               <a:lnSpc>
                 <a:spcPts val="2200"/>
@@ -23992,10 +24396,12 @@
             </a:r>
           </a:p>
           <a:p>
-            <a:pPr>
+            <a:pPr lvl="0" marL="457200" indent="-228600">
+              <a:buFont typeface="Calibri"/>
               <a:spcAft>
                 <a:spcPts val="1000"/>
               </a:spcAft>
+              <a:buSzPct val="100000"/>
               <a:buChar char="•"/>
               <a:lnSpc>
                 <a:spcPts val="2200"/>
@@ -24131,10 +24537,12 @@
           </a:bodyPr>
           <a:lstStyle/>
           <a:p>
-            <a:pPr>
+            <a:pPr lvl="0" marL="457200" indent="-228600">
+              <a:buFont typeface="Calibri"/>
               <a:spcAft>
                 <a:spcPts val="1000"/>
               </a:spcAft>
+              <a:buSzPct val="100000"/>
               <a:buChar char="•"/>
               <a:lnSpc>
                 <a:spcPts val="2200"/>
@@ -24151,10 +24559,12 @@
             </a:r>
           </a:p>
           <a:p>
-            <a:pPr>
+            <a:pPr lvl="0" marL="457200" indent="-228600">
+              <a:buFont typeface="Calibri"/>
               <a:spcAft>
                 <a:spcPts val="1000"/>
               </a:spcAft>
+              <a:buSzPct val="100000"/>
               <a:buChar char="•"/>
               <a:lnSpc>
                 <a:spcPts val="2200"/>
@@ -24171,10 +24581,12 @@
             </a:r>
           </a:p>
           <a:p>
-            <a:pPr>
+            <a:pPr lvl="0" marL="457200" indent="-228600">
+              <a:buFont typeface="Calibri"/>
               <a:spcAft>
                 <a:spcPts val="1000"/>
               </a:spcAft>
+              <a:buSzPct val="100000"/>
               <a:buChar char="•"/>
               <a:lnSpc>
                 <a:spcPts val="2200"/>
@@ -24310,10 +24722,12 @@
           </a:bodyPr>
           <a:lstStyle/>
           <a:p>
-            <a:pPr>
+            <a:pPr lvl="0" marL="457200" indent="-228600">
+              <a:buFont typeface="Calibri"/>
               <a:spcAft>
                 <a:spcPts val="1000"/>
               </a:spcAft>
+              <a:buSzPct val="100000"/>
               <a:buChar char="•"/>
               <a:lnSpc>
                 <a:spcPts val="2200"/>
@@ -24330,10 +24744,12 @@
             </a:r>
           </a:p>
           <a:p>
-            <a:pPr>
+            <a:pPr lvl="0" marL="457200" indent="-228600">
+              <a:buFont typeface="Calibri"/>
               <a:spcAft>
                 <a:spcPts val="1000"/>
               </a:spcAft>
+              <a:buSzPct val="100000"/>
               <a:buChar char="•"/>
               <a:lnSpc>
                 <a:spcPts val="2200"/>
@@ -24350,10 +24766,12 @@
             </a:r>
           </a:p>
           <a:p>
-            <a:pPr>
+            <a:pPr lvl="0" marL="457200" indent="-228600">
+              <a:buFont typeface="Calibri"/>
               <a:spcAft>
                 <a:spcPts val="1000"/>
               </a:spcAft>
+              <a:buSzPct val="100000"/>
               <a:buChar char="•"/>
               <a:lnSpc>
                 <a:spcPts val="2200"/>
@@ -24489,10 +24907,12 @@
           </a:bodyPr>
           <a:lstStyle/>
           <a:p>
-            <a:pPr>
+            <a:pPr lvl="0" marL="457200" indent="-228600">
+              <a:buFont typeface="Calibri"/>
               <a:spcAft>
                 <a:spcPts val="1000"/>
               </a:spcAft>
+              <a:buSzPct val="100000"/>
               <a:buChar char="•"/>
               <a:lnSpc>
                 <a:spcPts val="2200"/>
@@ -24509,10 +24929,12 @@
             </a:r>
           </a:p>
           <a:p>
-            <a:pPr>
+            <a:pPr lvl="0" marL="457200" indent="-228600">
+              <a:buFont typeface="Calibri"/>
               <a:spcAft>
                 <a:spcPts val="1000"/>
               </a:spcAft>
+              <a:buSzPct val="100000"/>
               <a:buChar char="•"/>
               <a:lnSpc>
                 <a:spcPts val="2200"/>
@@ -24529,10 +24951,12 @@
             </a:r>
           </a:p>
           <a:p>
-            <a:pPr>
+            <a:pPr lvl="0" marL="457200" indent="-228600">
+              <a:buFont typeface="Calibri"/>
               <a:spcAft>
                 <a:spcPts val="1000"/>
               </a:spcAft>
+              <a:buSzPct val="100000"/>
               <a:buChar char="•"/>
               <a:lnSpc>
                 <a:spcPts val="2200"/>
@@ -24668,10 +25092,12 @@
           </a:bodyPr>
           <a:lstStyle/>
           <a:p>
-            <a:pPr>
+            <a:pPr lvl="0" marL="457200" indent="-228600">
+              <a:buFont typeface="Calibri"/>
               <a:spcAft>
                 <a:spcPts val="1000"/>
               </a:spcAft>
+              <a:buSzPct val="100000"/>
               <a:buChar char="•"/>
               <a:lnSpc>
                 <a:spcPts val="2200"/>
@@ -24688,10 +25114,12 @@
             </a:r>
           </a:p>
           <a:p>
-            <a:pPr>
+            <a:pPr lvl="0" marL="457200" indent="-228600">
+              <a:buFont typeface="Calibri"/>
               <a:spcAft>
                 <a:spcPts val="1000"/>
               </a:spcAft>
+              <a:buSzPct val="100000"/>
               <a:buChar char="•"/>
               <a:lnSpc>
                 <a:spcPts val="2200"/>
@@ -24827,10 +25255,12 @@
           </a:bodyPr>
           <a:lstStyle/>
           <a:p>
-            <a:pPr>
+            <a:pPr lvl="0" marL="457200" indent="-228600">
+              <a:buFont typeface="Calibri"/>
               <a:spcAft>
                 <a:spcPts val="1000"/>
               </a:spcAft>
+              <a:buSzPct val="100000"/>
               <a:buChar char="•"/>
               <a:lnSpc>
                 <a:spcPts val="2200"/>
@@ -24847,10 +25277,12 @@
             </a:r>
           </a:p>
           <a:p>
-            <a:pPr>
+            <a:pPr lvl="0" marL="457200" indent="-228600">
+              <a:buFont typeface="Calibri"/>
               <a:spcAft>
                 <a:spcPts val="1000"/>
               </a:spcAft>
+              <a:buSzPct val="100000"/>
               <a:buChar char="•"/>
               <a:lnSpc>
                 <a:spcPts val="2200"/>
@@ -24867,10 +25299,12 @@
             </a:r>
           </a:p>
           <a:p>
-            <a:pPr>
+            <a:pPr lvl="0" marL="457200" indent="-228600">
+              <a:buFont typeface="Calibri"/>
               <a:spcAft>
                 <a:spcPts val="1000"/>
               </a:spcAft>
+              <a:buSzPct val="100000"/>
               <a:buChar char="•"/>
               <a:lnSpc>
                 <a:spcPts val="2200"/>
@@ -25006,10 +25440,12 @@
           </a:bodyPr>
           <a:lstStyle/>
           <a:p>
-            <a:pPr>
+            <a:pPr lvl="0" marL="457200" indent="-228600">
+              <a:buFont typeface="Calibri"/>
               <a:spcAft>
                 <a:spcPts val="1000"/>
               </a:spcAft>
+              <a:buSzPct val="100000"/>
               <a:buChar char="•"/>
               <a:lnSpc>
                 <a:spcPts val="2200"/>
@@ -25026,10 +25462,12 @@
             </a:r>
           </a:p>
           <a:p>
-            <a:pPr>
+            <a:pPr lvl="0" marL="457200" indent="-228600">
+              <a:buFont typeface="Calibri"/>
               <a:spcAft>
                 <a:spcPts val="1000"/>
               </a:spcAft>
+              <a:buSzPct val="100000"/>
               <a:buChar char="•"/>
               <a:lnSpc>
                 <a:spcPts val="2200"/>
@@ -25165,10 +25603,12 @@
           </a:bodyPr>
           <a:lstStyle/>
           <a:p>
-            <a:pPr>
+            <a:pPr lvl="0" marL="457200" indent="-228600">
+              <a:buFont typeface="Calibri"/>
               <a:spcAft>
                 <a:spcPts val="1000"/>
               </a:spcAft>
+              <a:buSzPct val="100000"/>
               <a:buChar char="•"/>
               <a:lnSpc>
                 <a:spcPts val="2200"/>
@@ -25185,10 +25625,12 @@
             </a:r>
           </a:p>
           <a:p>
-            <a:pPr>
+            <a:pPr lvl="0" marL="457200" indent="-228600">
+              <a:buFont typeface="Calibri"/>
               <a:spcAft>
                 <a:spcPts val="1000"/>
               </a:spcAft>
+              <a:buSzPct val="100000"/>
               <a:buChar char="•"/>
               <a:lnSpc>
                 <a:spcPts val="2200"/>
@@ -25205,10 +25647,12 @@
             </a:r>
           </a:p>
           <a:p>
-            <a:pPr>
+            <a:pPr lvl="0" marL="457200" indent="-228600">
+              <a:buFont typeface="Calibri"/>
               <a:spcAft>
                 <a:spcPts val="1000"/>
               </a:spcAft>
+              <a:buSzPct val="100000"/>
               <a:buChar char="•"/>
               <a:lnSpc>
                 <a:spcPts val="2200"/>
@@ -25344,10 +25788,12 @@
           </a:bodyPr>
           <a:lstStyle/>
           <a:p>
-            <a:pPr>
+            <a:pPr lvl="0" marL="457200" indent="-228600">
+              <a:buFont typeface="Calibri"/>
               <a:spcAft>
                 <a:spcPts val="1000"/>
               </a:spcAft>
+              <a:buSzPct val="100000"/>
               <a:buChar char="•"/>
               <a:lnSpc>
                 <a:spcPts val="2200"/>
@@ -25483,10 +25929,12 @@
           </a:bodyPr>
           <a:lstStyle/>
           <a:p>
-            <a:pPr>
+            <a:pPr lvl="0" marL="457200" indent="-228600">
+              <a:buFont typeface="Calibri"/>
               <a:spcAft>
                 <a:spcPts val="1000"/>
               </a:spcAft>
+              <a:buSzPct val="100000"/>
               <a:buChar char="•"/>
               <a:lnSpc>
                 <a:spcPts val="2200"/>
@@ -25503,10 +25951,12 @@
             </a:r>
           </a:p>
           <a:p>
-            <a:pPr>
+            <a:pPr lvl="0" marL="457200" indent="-228600">
+              <a:buFont typeface="Calibri"/>
               <a:spcAft>
                 <a:spcPts val="1000"/>
               </a:spcAft>
+              <a:buSzPct val="100000"/>
               <a:buChar char="•"/>
               <a:lnSpc>
                 <a:spcPts val="2200"/>
@@ -25523,10 +25973,12 @@
             </a:r>
           </a:p>
           <a:p>
-            <a:pPr>
+            <a:pPr lvl="0" marL="457200" indent="-228600">
+              <a:buFont typeface="Calibri"/>
               <a:spcAft>
                 <a:spcPts val="1000"/>
               </a:spcAft>
+              <a:buSzPct val="100000"/>
               <a:buChar char="•"/>
               <a:lnSpc>
                 <a:spcPts val="2200"/>
@@ -25662,10 +26114,12 @@
           </a:bodyPr>
           <a:lstStyle/>
           <a:p>
-            <a:pPr>
+            <a:pPr lvl="0" marL="457200" indent="-228600">
+              <a:buFont typeface="Calibri"/>
               <a:spcAft>
                 <a:spcPts val="1000"/>
               </a:spcAft>
+              <a:buSzPct val="100000"/>
               <a:buChar char="•"/>
               <a:lnSpc>
                 <a:spcPts val="2200"/>
@@ -25682,10 +26136,12 @@
             </a:r>
           </a:p>
           <a:p>
-            <a:pPr>
+            <a:pPr lvl="0" marL="457200" indent="-228600">
+              <a:buFont typeface="Calibri"/>
               <a:spcAft>
                 <a:spcPts val="1000"/>
               </a:spcAft>
+              <a:buSzPct val="100000"/>
               <a:buChar char="•"/>
               <a:lnSpc>
                 <a:spcPts val="2200"/>
@@ -25702,10 +26158,12 @@
             </a:r>
           </a:p>
           <a:p>
-            <a:pPr>
+            <a:pPr lvl="0" marL="457200" indent="-228600">
+              <a:buFont typeface="Calibri"/>
               <a:spcAft>
                 <a:spcPts val="1000"/>
               </a:spcAft>
+              <a:buSzPct val="100000"/>
               <a:buChar char="•"/>
               <a:lnSpc>
                 <a:spcPts val="2200"/>
@@ -25722,10 +26180,12 @@
             </a:r>
           </a:p>
           <a:p>
-            <a:pPr>
+            <a:pPr lvl="0" marL="457200" indent="-228600">
+              <a:buFont typeface="Calibri"/>
               <a:spcAft>
                 <a:spcPts val="1000"/>
               </a:spcAft>
+              <a:buSzPct val="100000"/>
               <a:buChar char="•"/>
               <a:lnSpc>
                 <a:spcPts val="2200"/>
@@ -25742,10 +26202,12 @@
             </a:r>
           </a:p>
           <a:p>
-            <a:pPr>
+            <a:pPr lvl="0" marL="457200" indent="-228600">
+              <a:buFont typeface="Calibri"/>
               <a:spcAft>
                 <a:spcPts val="1000"/>
               </a:spcAft>
+              <a:buSzPct val="100000"/>
               <a:buChar char="•"/>
               <a:lnSpc>
                 <a:spcPts val="2200"/>
@@ -25762,10 +26224,12 @@
             </a:r>
           </a:p>
           <a:p>
-            <a:pPr>
+            <a:pPr lvl="0" marL="457200" indent="-228600">
+              <a:buFont typeface="Calibri"/>
               <a:spcAft>
                 <a:spcPts val="1000"/>
               </a:spcAft>
+              <a:buSzPct val="100000"/>
               <a:buChar char="•"/>
               <a:lnSpc>
                 <a:spcPts val="2200"/>
@@ -25901,10 +26365,12 @@
           </a:bodyPr>
           <a:lstStyle/>
           <a:p>
-            <a:pPr>
+            <a:pPr lvl="0" marL="457200" indent="-228600">
+              <a:buFont typeface="Calibri"/>
               <a:spcAft>
                 <a:spcPts val="1000"/>
               </a:spcAft>
+              <a:buSzPct val="100000"/>
               <a:buChar char="•"/>
               <a:lnSpc>
                 <a:spcPts val="2200"/>
@@ -25921,10 +26387,12 @@
             </a:r>
           </a:p>
           <a:p>
-            <a:pPr>
+            <a:pPr lvl="0" marL="457200" indent="-228600">
+              <a:buFont typeface="Calibri"/>
               <a:spcAft>
                 <a:spcPts val="1000"/>
               </a:spcAft>
+              <a:buSzPct val="100000"/>
               <a:buChar char="•"/>
               <a:lnSpc>
                 <a:spcPts val="2200"/>
@@ -25941,10 +26409,12 @@
             </a:r>
           </a:p>
           <a:p>
-            <a:pPr>
+            <a:pPr lvl="0" marL="457200" indent="-228600">
+              <a:buFont typeface="Calibri"/>
               <a:spcAft>
                 <a:spcPts val="1000"/>
               </a:spcAft>
+              <a:buSzPct val="100000"/>
               <a:buChar char="•"/>
               <a:lnSpc>
                 <a:spcPts val="2200"/>
@@ -25961,10 +26431,12 @@
             </a:r>
           </a:p>
           <a:p>
-            <a:pPr>
+            <a:pPr lvl="0" marL="457200" indent="-228600">
+              <a:buFont typeface="Calibri"/>
               <a:spcAft>
                 <a:spcPts val="1000"/>
               </a:spcAft>
+              <a:buSzPct val="100000"/>
               <a:buChar char="•"/>
               <a:lnSpc>
                 <a:spcPts val="2200"/>
@@ -25981,10 +26453,12 @@
             </a:r>
           </a:p>
           <a:p>
-            <a:pPr>
+            <a:pPr lvl="0" marL="457200" indent="-228600">
+              <a:buFont typeface="Calibri"/>
               <a:spcAft>
                 <a:spcPts val="1000"/>
               </a:spcAft>
+              <a:buSzPct val="100000"/>
               <a:buChar char="•"/>
               <a:lnSpc>
                 <a:spcPts val="2200"/>
@@ -26001,10 +26475,12 @@
             </a:r>
           </a:p>
           <a:p>
-            <a:pPr>
+            <a:pPr lvl="0" marL="457200" indent="-228600">
+              <a:buFont typeface="Calibri"/>
               <a:spcAft>
                 <a:spcPts val="1000"/>
               </a:spcAft>
+              <a:buSzPct val="100000"/>
               <a:buChar char="•"/>
               <a:lnSpc>
                 <a:spcPts val="2200"/>
@@ -26140,10 +26616,12 @@
           </a:bodyPr>
           <a:lstStyle/>
           <a:p>
-            <a:pPr>
+            <a:pPr lvl="0" marL="457200" indent="-228600">
+              <a:buFont typeface="Calibri"/>
               <a:spcAft>
                 <a:spcPts val="1000"/>
               </a:spcAft>
+              <a:buSzPct val="100000"/>
               <a:buChar char="•"/>
               <a:lnSpc>
                 <a:spcPts val="2200"/>
@@ -26160,10 +26638,12 @@
             </a:r>
           </a:p>
           <a:p>
-            <a:pPr>
+            <a:pPr lvl="0" marL="457200" indent="-228600">
+              <a:buFont typeface="Calibri"/>
               <a:spcAft>
                 <a:spcPts val="1000"/>
               </a:spcAft>
+              <a:buSzPct val="100000"/>
               <a:buChar char="•"/>
               <a:lnSpc>
                 <a:spcPts val="2200"/>
@@ -26180,10 +26660,12 @@
             </a:r>
           </a:p>
           <a:p>
-            <a:pPr>
+            <a:pPr lvl="0" marL="457200" indent="-228600">
+              <a:buFont typeface="Calibri"/>
               <a:spcAft>
                 <a:spcPts val="1000"/>
               </a:spcAft>
+              <a:buSzPct val="100000"/>
               <a:buChar char="•"/>
               <a:lnSpc>
                 <a:spcPts val="2200"/>
@@ -26319,10 +26801,12 @@
           </a:bodyPr>
           <a:lstStyle/>
           <a:p>
-            <a:pPr>
+            <a:pPr lvl="0" marL="457200" indent="-228600">
+              <a:buFont typeface="Calibri"/>
               <a:spcAft>
                 <a:spcPts val="1000"/>
               </a:spcAft>
+              <a:buSzPct val="100000"/>
               <a:buChar char="•"/>
               <a:lnSpc>
                 <a:spcPts val="2200"/>
@@ -26339,10 +26823,12 @@
             </a:r>
           </a:p>
           <a:p>
-            <a:pPr>
+            <a:pPr lvl="0" marL="457200" indent="-228600">
+              <a:buFont typeface="Calibri"/>
               <a:spcAft>
                 <a:spcPts val="1000"/>
               </a:spcAft>
+              <a:buSzPct val="100000"/>
               <a:buChar char="•"/>
               <a:lnSpc>
                 <a:spcPts val="2200"/>
@@ -26359,10 +26845,12 @@
             </a:r>
           </a:p>
           <a:p>
-            <a:pPr>
+            <a:pPr lvl="0" marL="457200" indent="-228600">
+              <a:buFont typeface="Calibri"/>
               <a:spcAft>
                 <a:spcPts val="1000"/>
               </a:spcAft>
+              <a:buSzPct val="100000"/>
               <a:buChar char="•"/>
               <a:lnSpc>
                 <a:spcPts val="2200"/>
@@ -26379,10 +26867,12 @@
             </a:r>
           </a:p>
           <a:p>
-            <a:pPr>
+            <a:pPr lvl="0" marL="457200" indent="-228600">
+              <a:buFont typeface="Calibri"/>
               <a:spcAft>
                 <a:spcPts val="1000"/>
               </a:spcAft>
+              <a:buSzPct val="100000"/>
               <a:buChar char="•"/>
               <a:lnSpc>
                 <a:spcPts val="2200"/>
@@ -26399,10 +26889,12 @@
             </a:r>
           </a:p>
           <a:p>
-            <a:pPr>
+            <a:pPr lvl="0" marL="457200" indent="-228600">
+              <a:buFont typeface="Calibri"/>
               <a:spcAft>
                 <a:spcPts val="1000"/>
               </a:spcAft>
+              <a:buSzPct val="100000"/>
               <a:buChar char="•"/>
               <a:lnSpc>
                 <a:spcPts val="2200"/>
@@ -26538,10 +27030,12 @@
           </a:bodyPr>
           <a:lstStyle/>
           <a:p>
-            <a:pPr>
+            <a:pPr lvl="0" marL="457200" indent="-228600">
+              <a:buFont typeface="Calibri"/>
               <a:spcAft>
                 <a:spcPts val="1000"/>
               </a:spcAft>
+              <a:buSzPct val="100000"/>
               <a:buChar char="•"/>
               <a:lnSpc>
                 <a:spcPts val="2200"/>
@@ -26558,10 +27052,12 @@
             </a:r>
           </a:p>
           <a:p>
-            <a:pPr>
+            <a:pPr lvl="0" marL="457200" indent="-228600">
+              <a:buFont typeface="Calibri"/>
               <a:spcAft>
                 <a:spcPts val="1000"/>
               </a:spcAft>
+              <a:buSzPct val="100000"/>
               <a:buChar char="•"/>
               <a:lnSpc>
                 <a:spcPts val="2200"/>
@@ -26578,10 +27074,12 @@
             </a:r>
           </a:p>
           <a:p>
-            <a:pPr>
+            <a:pPr lvl="0" marL="457200" indent="-228600">
+              <a:buFont typeface="Calibri"/>
               <a:spcAft>
                 <a:spcPts val="1000"/>
               </a:spcAft>
+              <a:buSzPct val="100000"/>
               <a:buChar char="•"/>
               <a:lnSpc>
                 <a:spcPts val="2200"/>
@@ -26598,10 +27096,12 @@
             </a:r>
           </a:p>
           <a:p>
-            <a:pPr>
+            <a:pPr lvl="0" marL="457200" indent="-228600">
+              <a:buFont typeface="Calibri"/>
               <a:spcAft>
                 <a:spcPts val="1000"/>
               </a:spcAft>
+              <a:buSzPct val="100000"/>
               <a:buChar char="•"/>
               <a:lnSpc>
                 <a:spcPts val="2200"/>
@@ -26618,10 +27118,12 @@
             </a:r>
           </a:p>
           <a:p>
-            <a:pPr>
+            <a:pPr lvl="0" marL="457200" indent="-228600">
+              <a:buFont typeface="Calibri"/>
               <a:spcAft>
                 <a:spcPts val="1000"/>
               </a:spcAft>
+              <a:buSzPct val="100000"/>
               <a:buChar char="•"/>
               <a:lnSpc>
                 <a:spcPts val="2200"/>
@@ -26757,10 +27259,12 @@
           </a:bodyPr>
           <a:lstStyle/>
           <a:p>
-            <a:pPr>
+            <a:pPr lvl="0" marL="457200" indent="-228600">
+              <a:buFont typeface="Calibri"/>
               <a:spcAft>
                 <a:spcPts val="1000"/>
               </a:spcAft>
+              <a:buSzPct val="100000"/>
               <a:buChar char="•"/>
               <a:lnSpc>
                 <a:spcPts val="2200"/>
@@ -26777,10 +27281,12 @@
             </a:r>
           </a:p>
           <a:p>
-            <a:pPr>
+            <a:pPr lvl="0" marL="457200" indent="-228600">
+              <a:buFont typeface="Calibri"/>
               <a:spcAft>
                 <a:spcPts val="1000"/>
               </a:spcAft>
+              <a:buSzPct val="100000"/>
               <a:buChar char="•"/>
               <a:lnSpc>
                 <a:spcPts val="2200"/>
@@ -26797,10 +27303,12 @@
             </a:r>
           </a:p>
           <a:p>
-            <a:pPr>
+            <a:pPr lvl="0" marL="457200" indent="-228600">
+              <a:buFont typeface="Calibri"/>
               <a:spcAft>
                 <a:spcPts val="1000"/>
               </a:spcAft>
+              <a:buSzPct val="100000"/>
               <a:buChar char="•"/>
               <a:lnSpc>
                 <a:spcPts val="2200"/>
@@ -26936,10 +27444,12 @@
           </a:bodyPr>
           <a:lstStyle/>
           <a:p>
-            <a:pPr>
+            <a:pPr lvl="0" marL="457200" indent="-228600">
+              <a:buFont typeface="Calibri"/>
               <a:spcAft>
                 <a:spcPts val="1000"/>
               </a:spcAft>
+              <a:buSzPct val="100000"/>
               <a:buChar char="•"/>
               <a:lnSpc>
                 <a:spcPts val="2200"/>
@@ -26956,10 +27466,12 @@
             </a:r>
           </a:p>
           <a:p>
-            <a:pPr>
+            <a:pPr lvl="0" marL="457200" indent="-228600">
+              <a:buFont typeface="Calibri"/>
               <a:spcAft>
                 <a:spcPts val="1000"/>
               </a:spcAft>
+              <a:buSzPct val="100000"/>
               <a:buChar char="•"/>
               <a:lnSpc>
                 <a:spcPts val="2200"/>
@@ -26976,10 +27488,12 @@
             </a:r>
           </a:p>
           <a:p>
-            <a:pPr>
+            <a:pPr lvl="0" marL="457200" indent="-228600">
+              <a:buFont typeface="Calibri"/>
               <a:spcAft>
                 <a:spcPts val="1000"/>
               </a:spcAft>
+              <a:buSzPct val="100000"/>
               <a:buChar char="•"/>
               <a:lnSpc>
                 <a:spcPts val="2200"/>
@@ -27115,10 +27629,12 @@
           </a:bodyPr>
           <a:lstStyle/>
           <a:p>
-            <a:pPr>
+            <a:pPr lvl="0" marL="457200" indent="-228600">
+              <a:buFont typeface="Calibri"/>
               <a:spcAft>
                 <a:spcPts val="1000"/>
               </a:spcAft>
+              <a:buSzPct val="100000"/>
               <a:buChar char="•"/>
               <a:lnSpc>
                 <a:spcPts val="2200"/>
@@ -27135,10 +27651,12 @@
             </a:r>
           </a:p>
           <a:p>
-            <a:pPr>
+            <a:pPr lvl="0" marL="457200" indent="-228600">
+              <a:buFont typeface="Calibri"/>
               <a:spcAft>
                 <a:spcPts val="1000"/>
               </a:spcAft>
+              <a:buSzPct val="100000"/>
               <a:buChar char="•"/>
               <a:lnSpc>
                 <a:spcPts val="2200"/>
@@ -27274,10 +27792,12 @@
           </a:bodyPr>
           <a:lstStyle/>
           <a:p>
-            <a:pPr>
+            <a:pPr lvl="0" marL="457200" indent="-228600">
+              <a:buFont typeface="Calibri"/>
               <a:spcAft>
                 <a:spcPts val="1000"/>
               </a:spcAft>
+              <a:buSzPct val="100000"/>
               <a:buChar char="•"/>
               <a:lnSpc>
                 <a:spcPts val="2200"/>
@@ -27294,10 +27814,12 @@
             </a:r>
           </a:p>
           <a:p>
-            <a:pPr>
+            <a:pPr lvl="0" marL="457200" indent="-228600">
+              <a:buFont typeface="Calibri"/>
               <a:spcAft>
                 <a:spcPts val="1000"/>
               </a:spcAft>
+              <a:buSzPct val="100000"/>
               <a:buChar char="•"/>
               <a:lnSpc>
                 <a:spcPts val="2200"/>
@@ -27433,10 +27955,12 @@
           </a:bodyPr>
           <a:lstStyle/>
           <a:p>
-            <a:pPr>
+            <a:pPr lvl="0" marL="457200" indent="-228600">
+              <a:buFont typeface="Calibri"/>
               <a:spcAft>
                 <a:spcPts val="1000"/>
               </a:spcAft>
+              <a:buSzPct val="100000"/>
               <a:buChar char="•"/>
               <a:lnSpc>
                 <a:spcPts val="2200"/>
@@ -27572,10 +28096,12 @@
           </a:bodyPr>
           <a:lstStyle/>
           <a:p>
-            <a:pPr>
+            <a:pPr lvl="0" marL="457200" indent="-228600">
+              <a:buFont typeface="Calibri"/>
               <a:spcAft>
                 <a:spcPts val="1000"/>
               </a:spcAft>
+              <a:buSzPct val="100000"/>
               <a:buChar char="•"/>
               <a:lnSpc>
                 <a:spcPts val="2200"/>
@@ -27592,10 +28118,12 @@
             </a:r>
           </a:p>
           <a:p>
-            <a:pPr>
+            <a:pPr lvl="0" marL="457200" indent="-228600">
+              <a:buFont typeface="Calibri"/>
               <a:spcAft>
                 <a:spcPts val="1000"/>
               </a:spcAft>
+              <a:buSzPct val="100000"/>
               <a:buChar char="•"/>
               <a:lnSpc>
                 <a:spcPts val="2200"/>
@@ -27731,10 +28259,12 @@
           </a:bodyPr>
           <a:lstStyle/>
           <a:p>
-            <a:pPr>
+            <a:pPr lvl="0" marL="457200" indent="-228600">
+              <a:buFont typeface="Calibri"/>
               <a:spcAft>
                 <a:spcPts val="1000"/>
               </a:spcAft>
+              <a:buSzPct val="100000"/>
               <a:buChar char="•"/>
               <a:lnSpc>
                 <a:spcPts val="2200"/>
@@ -27751,10 +28281,12 @@
             </a:r>
           </a:p>
           <a:p>
-            <a:pPr>
+            <a:pPr lvl="0" marL="457200" indent="-228600">
+              <a:buFont typeface="Calibri"/>
               <a:spcAft>
                 <a:spcPts val="1000"/>
               </a:spcAft>
+              <a:buSzPct val="100000"/>
               <a:buChar char="•"/>
               <a:lnSpc>
                 <a:spcPts val="2200"/>
@@ -27771,10 +28303,12 @@
             </a:r>
           </a:p>
           <a:p>
-            <a:pPr>
+            <a:pPr lvl="0" marL="457200" indent="-228600">
+              <a:buFont typeface="Calibri"/>
               <a:spcAft>
                 <a:spcPts val="1000"/>
               </a:spcAft>
+              <a:buSzPct val="100000"/>
               <a:buChar char="•"/>
               <a:lnSpc>
                 <a:spcPts val="2200"/>
@@ -27791,10 +28325,12 @@
             </a:r>
           </a:p>
           <a:p>
-            <a:pPr>
+            <a:pPr lvl="0" marL="457200" indent="-228600">
+              <a:buFont typeface="Calibri"/>
               <a:spcAft>
                 <a:spcPts val="1000"/>
               </a:spcAft>
+              <a:buSzPct val="100000"/>
               <a:buChar char="•"/>
               <a:lnSpc>
                 <a:spcPts val="2200"/>
@@ -27811,10 +28347,12 @@
             </a:r>
           </a:p>
           <a:p>
-            <a:pPr>
+            <a:pPr lvl="0" marL="457200" indent="-228600">
+              <a:buFont typeface="Calibri"/>
               <a:spcAft>
                 <a:spcPts val="1000"/>
               </a:spcAft>
+              <a:buSzPct val="100000"/>
               <a:buChar char="•"/>
               <a:lnSpc>
                 <a:spcPts val="2200"/>
@@ -27831,10 +28369,12 @@
             </a:r>
           </a:p>
           <a:p>
-            <a:pPr>
+            <a:pPr lvl="0" marL="457200" indent="-228600">
+              <a:buFont typeface="Calibri"/>
               <a:spcAft>
                 <a:spcPts val="1000"/>
               </a:spcAft>
+              <a:buSzPct val="100000"/>
               <a:buChar char="•"/>
               <a:lnSpc>
                 <a:spcPts val="2200"/>
@@ -27970,10 +28510,12 @@
           </a:bodyPr>
           <a:lstStyle/>
           <a:p>
-            <a:pPr>
+            <a:pPr lvl="0" marL="457200" indent="-228600">
+              <a:buFont typeface="Calibri"/>
               <a:spcAft>
                 <a:spcPts val="1000"/>
               </a:spcAft>
+              <a:buSzPct val="100000"/>
               <a:buChar char="•"/>
               <a:lnSpc>
                 <a:spcPts val="2200"/>
@@ -27990,10 +28532,12 @@
             </a:r>
           </a:p>
           <a:p>
-            <a:pPr>
+            <a:pPr lvl="0" marL="457200" indent="-228600">
+              <a:buFont typeface="Calibri"/>
               <a:spcAft>
                 <a:spcPts val="1000"/>
               </a:spcAft>
+              <a:buSzPct val="100000"/>
               <a:buChar char="•"/>
               <a:lnSpc>
                 <a:spcPts val="2200"/>
@@ -28010,10 +28554,12 @@
             </a:r>
           </a:p>
           <a:p>
-            <a:pPr>
+            <a:pPr lvl="0" marL="457200" indent="-228600">
+              <a:buFont typeface="Calibri"/>
               <a:spcAft>
                 <a:spcPts val="1000"/>
               </a:spcAft>
+              <a:buSzPct val="100000"/>
               <a:buChar char="•"/>
               <a:lnSpc>
                 <a:spcPts val="2200"/>
@@ -28030,10 +28576,12 @@
             </a:r>
           </a:p>
           <a:p>
-            <a:pPr>
+            <a:pPr lvl="0" marL="457200" indent="-228600">
+              <a:buFont typeface="Calibri"/>
               <a:spcAft>
                 <a:spcPts val="1000"/>
               </a:spcAft>
+              <a:buSzPct val="100000"/>
               <a:buChar char="•"/>
               <a:lnSpc>
                 <a:spcPts val="2200"/>
@@ -28050,10 +28598,12 @@
             </a:r>
           </a:p>
           <a:p>
-            <a:pPr>
+            <a:pPr lvl="0" marL="457200" indent="-228600">
+              <a:buFont typeface="Calibri"/>
               <a:spcAft>
                 <a:spcPts val="1000"/>
               </a:spcAft>
+              <a:buSzPct val="100000"/>
               <a:buChar char="•"/>
               <a:lnSpc>
                 <a:spcPts val="2200"/>
@@ -28070,10 +28620,12 @@
             </a:r>
           </a:p>
           <a:p>
-            <a:pPr>
+            <a:pPr lvl="0" marL="457200" indent="-228600">
+              <a:buFont typeface="Calibri"/>
               <a:spcAft>
                 <a:spcPts val="1000"/>
               </a:spcAft>
+              <a:buSzPct val="100000"/>
               <a:buChar char="•"/>
               <a:lnSpc>
                 <a:spcPts val="2200"/>
@@ -28209,10 +28761,12 @@
           </a:bodyPr>
           <a:lstStyle/>
           <a:p>
-            <a:pPr>
+            <a:pPr lvl="0" marL="457200" indent="-228600">
+              <a:buFont typeface="Calibri"/>
               <a:spcAft>
                 <a:spcPts val="1000"/>
               </a:spcAft>
+              <a:buSzPct val="100000"/>
               <a:buChar char="•"/>
               <a:lnSpc>
                 <a:spcPts val="2200"/>
@@ -28229,10 +28783,12 @@
             </a:r>
           </a:p>
           <a:p>
-            <a:pPr>
+            <a:pPr lvl="0" marL="457200" indent="-228600">
+              <a:buFont typeface="Calibri"/>
               <a:spcAft>
                 <a:spcPts val="1000"/>
               </a:spcAft>
+              <a:buSzPct val="100000"/>
               <a:buChar char="•"/>
               <a:lnSpc>
                 <a:spcPts val="2200"/>
@@ -28249,10 +28805,12 @@
             </a:r>
           </a:p>
           <a:p>
-            <a:pPr>
+            <a:pPr lvl="0" marL="457200" indent="-228600">
+              <a:buFont typeface="Calibri"/>
               <a:spcAft>
                 <a:spcPts val="1000"/>
               </a:spcAft>
+              <a:buSzPct val="100000"/>
               <a:buChar char="•"/>
               <a:lnSpc>
                 <a:spcPts val="2200"/>
@@ -28388,10 +28946,12 @@
           </a:bodyPr>
           <a:lstStyle/>
           <a:p>
-            <a:pPr>
+            <a:pPr lvl="0" marL="457200" indent="-228600">
+              <a:buFont typeface="Calibri"/>
               <a:spcAft>
                 <a:spcPts val="1000"/>
               </a:spcAft>
+              <a:buSzPct val="100000"/>
               <a:buChar char="•"/>
               <a:lnSpc>
                 <a:spcPts val="2200"/>
@@ -28408,10 +28968,12 @@
             </a:r>
           </a:p>
           <a:p>
-            <a:pPr>
+            <a:pPr lvl="0" marL="457200" indent="-228600">
+              <a:buFont typeface="Calibri"/>
               <a:spcAft>
                 <a:spcPts val="1000"/>
               </a:spcAft>
+              <a:buSzPct val="100000"/>
               <a:buChar char="•"/>
               <a:lnSpc>
                 <a:spcPts val="2200"/>
@@ -28428,10 +28990,12 @@
             </a:r>
           </a:p>
           <a:p>
-            <a:pPr>
+            <a:pPr lvl="0" marL="457200" indent="-228600">
+              <a:buFont typeface="Calibri"/>
               <a:spcAft>
                 <a:spcPts val="1000"/>
               </a:spcAft>
+              <a:buSzPct val="100000"/>
               <a:buChar char="•"/>
               <a:lnSpc>
                 <a:spcPts val="2200"/>
@@ -28448,10 +29012,12 @@
             </a:r>
           </a:p>
           <a:p>
-            <a:pPr>
+            <a:pPr lvl="0" marL="457200" indent="-228600">
+              <a:buFont typeface="Calibri"/>
               <a:spcAft>
                 <a:spcPts val="1000"/>
               </a:spcAft>
+              <a:buSzPct val="100000"/>
               <a:buChar char="•"/>
               <a:lnSpc>
                 <a:spcPts val="2200"/>
@@ -28468,10 +29034,12 @@
             </a:r>
           </a:p>
           <a:p>
-            <a:pPr>
+            <a:pPr lvl="0" marL="457200" indent="-228600">
+              <a:buFont typeface="Calibri"/>
               <a:spcAft>
                 <a:spcPts val="1000"/>
               </a:spcAft>
+              <a:buSzPct val="100000"/>
               <a:buChar char="•"/>
               <a:lnSpc>
                 <a:spcPts val="2200"/>
@@ -28607,10 +29175,12 @@
           </a:bodyPr>
           <a:lstStyle/>
           <a:p>
-            <a:pPr>
+            <a:pPr lvl="0" marL="457200" indent="-228600">
+              <a:buFont typeface="Calibri"/>
               <a:spcAft>
                 <a:spcPts val="1000"/>
               </a:spcAft>
+              <a:buSzPct val="100000"/>
               <a:buChar char="•"/>
               <a:lnSpc>
                 <a:spcPts val="2200"/>
@@ -28627,10 +29197,12 @@
             </a:r>
           </a:p>
           <a:p>
-            <a:pPr>
+            <a:pPr lvl="0" marL="457200" indent="-228600">
+              <a:buFont typeface="Calibri"/>
               <a:spcAft>
                 <a:spcPts val="1000"/>
               </a:spcAft>
+              <a:buSzPct val="100000"/>
               <a:buChar char="•"/>
               <a:lnSpc>
                 <a:spcPts val="2200"/>
@@ -28647,10 +29219,12 @@
             </a:r>
           </a:p>
           <a:p>
-            <a:pPr>
+            <a:pPr lvl="0" marL="457200" indent="-228600">
+              <a:buFont typeface="Calibri"/>
               <a:spcAft>
                 <a:spcPts val="1000"/>
               </a:spcAft>
+              <a:buSzPct val="100000"/>
               <a:buChar char="•"/>
               <a:lnSpc>
                 <a:spcPts val="2200"/>
@@ -28667,10 +29241,12 @@
             </a:r>
           </a:p>
           <a:p>
-            <a:pPr>
+            <a:pPr lvl="0" marL="457200" indent="-228600">
+              <a:buFont typeface="Calibri"/>
               <a:spcAft>
                 <a:spcPts val="1000"/>
               </a:spcAft>
+              <a:buSzPct val="100000"/>
               <a:buChar char="•"/>
               <a:lnSpc>
                 <a:spcPts val="2200"/>
@@ -28687,10 +29263,12 @@
             </a:r>
           </a:p>
           <a:p>
-            <a:pPr>
+            <a:pPr lvl="0" marL="457200" indent="-228600">
+              <a:buFont typeface="Calibri"/>
               <a:spcAft>
                 <a:spcPts val="1000"/>
               </a:spcAft>
+              <a:buSzPct val="100000"/>
               <a:buChar char="•"/>
               <a:lnSpc>
                 <a:spcPts val="2200"/>
@@ -28826,10 +29404,12 @@
           </a:bodyPr>
           <a:lstStyle/>
           <a:p>
-            <a:pPr>
+            <a:pPr lvl="0" marL="457200" indent="-228600">
+              <a:buFont typeface="Calibri"/>
               <a:spcAft>
                 <a:spcPts val="1000"/>
               </a:spcAft>
+              <a:buSzPct val="100000"/>
               <a:buChar char="•"/>
               <a:lnSpc>
                 <a:spcPts val="2200"/>
@@ -28846,10 +29426,12 @@
             </a:r>
           </a:p>
           <a:p>
-            <a:pPr>
+            <a:pPr lvl="0" marL="457200" indent="-228600">
+              <a:buFont typeface="Calibri"/>
               <a:spcAft>
                 <a:spcPts val="1000"/>
               </a:spcAft>
+              <a:buSzPct val="100000"/>
               <a:buChar char="•"/>
               <a:lnSpc>
                 <a:spcPts val="2200"/>
@@ -28866,10 +29448,12 @@
             </a:r>
           </a:p>
           <a:p>
-            <a:pPr>
+            <a:pPr lvl="0" marL="457200" indent="-228600">
+              <a:buFont typeface="Calibri"/>
               <a:spcAft>
                 <a:spcPts val="1000"/>
               </a:spcAft>
+              <a:buSzPct val="100000"/>
               <a:buChar char="•"/>
               <a:lnSpc>
                 <a:spcPts val="2200"/>
@@ -29005,10 +29589,12 @@
           </a:bodyPr>
           <a:lstStyle/>
           <a:p>
-            <a:pPr>
+            <a:pPr lvl="0" marL="457200" indent="-228600">
+              <a:buFont typeface="Calibri"/>
               <a:spcAft>
                 <a:spcPts val="1000"/>
               </a:spcAft>
+              <a:buSzPct val="100000"/>
               <a:buChar char="•"/>
               <a:lnSpc>
                 <a:spcPts val="2200"/>
@@ -29025,10 +29611,12 @@
             </a:r>
           </a:p>
           <a:p>
-            <a:pPr>
+            <a:pPr lvl="0" marL="457200" indent="-228600">
+              <a:buFont typeface="Calibri"/>
               <a:spcAft>
                 <a:spcPts val="1000"/>
               </a:spcAft>
+              <a:buSzPct val="100000"/>
               <a:buChar char="•"/>
               <a:lnSpc>
                 <a:spcPts val="2200"/>
@@ -29045,10 +29633,12 @@
             </a:r>
           </a:p>
           <a:p>
-            <a:pPr>
+            <a:pPr lvl="0" marL="457200" indent="-228600">
+              <a:buFont typeface="Calibri"/>
               <a:spcAft>
                 <a:spcPts val="1000"/>
               </a:spcAft>
+              <a:buSzPct val="100000"/>
               <a:buChar char="•"/>
               <a:lnSpc>
                 <a:spcPts val="2200"/>
@@ -29184,10 +29774,12 @@
           </a:bodyPr>
           <a:lstStyle/>
           <a:p>
-            <a:pPr>
+            <a:pPr lvl="0" marL="457200" indent="-228600">
+              <a:buFont typeface="Calibri"/>
               <a:spcAft>
                 <a:spcPts val="1000"/>
               </a:spcAft>
+              <a:buSzPct val="100000"/>
               <a:buChar char="•"/>
               <a:lnSpc>
                 <a:spcPts val="2200"/>
@@ -29204,10 +29796,12 @@
             </a:r>
           </a:p>
           <a:p>
-            <a:pPr>
+            <a:pPr lvl="0" marL="457200" indent="-228600">
+              <a:buFont typeface="Calibri"/>
               <a:spcAft>
                 <a:spcPts val="1000"/>
               </a:spcAft>
+              <a:buSzPct val="100000"/>
               <a:buChar char="•"/>
               <a:lnSpc>
                 <a:spcPts val="2200"/>
